--- a/slides/modules/m23-app-modernization.pptx
+++ b/slides/modules/m23-app-modernization.pptx
@@ -12,6 +12,7 @@
     <p:sldId id="260" r:id="rId12"/>
     <p:sldId id="261" r:id="rId13"/>
     <p:sldId id="262" r:id="rId14"/>
+    <p:sldId id="263" r:id="rId15"/>
   </p:sldIdLst>
   <p:sldSz cx="12191695" cy="6858000" type="screen4x3"/>
   <p:notesSz cx="6858000" cy="9144000"/>
@@ -859,6 +860,76 @@
           <a:p>
             <a:r>
               <a:t>You do not modernize a portfolio by rewriting all of it at once — you run a funnel. Assess the whole portfolio with a questionnaire per app to rank candidates; analyze the candidates with MTA to price them; fix and ship the ones where effort is low and value is high, banking the win and the pattern; repeat, and retain or retire the rest deliberately. The incremental path for a big monolith is the strangler pattern: stand the modern service up beside the legacy one, route a slice of traffic to it, and grow that slice until the legacy app is strangled — off, with no big-bang cutover. That routing and coexistence is a connectivity problem, exactly what Service Interconnect solves across clusters and sites, which is the Resilience, Multi-Cluster &amp; DR module. And be honest about when not to modernize: retire what you'll turn off within the year, stop at replatform when it gets you most of the value, and never accept an AI diff you didn't read.</a:t>
+            </a:r>
+          </a:p>
+        </p:txBody>
+      </p:sp>
+      <p:sp>
+        <p:nvSpPr>
+          <p:cNvPr id="4" name="Slide Number Placeholder 3"/>
+          <p:cNvSpPr>
+            <a:spLocks noGrp="1"/>
+          </p:cNvSpPr>
+          <p:nvPr>
+            <p:ph type="sldNum" idx="5" sz="quarter"/>
+          </p:nvPr>
+        </p:nvSpPr>
+        <p:spPr/>
+      </p:sp>
+    </p:spTree>
+  </p:cSld>
+  <p:clrMapOvr>
+    <a:masterClrMapping/>
+  </p:clrMapOvr>
+</p:notes>
+</file>
+
+<file path=ppt/notesSlides/notesSlide7.xml><?xml version="1.0" encoding="utf-8"?>
+<p:notes xmlns:a="http://schemas.openxmlformats.org/drawingml/2006/main" xmlns:p="http://schemas.openxmlformats.org/presentationml/2006/main" xmlns:r="http://schemas.openxmlformats.org/officeDocument/2006/relationships">
+  <p:cSld>
+    <p:spTree>
+      <p:nvGrpSpPr>
+        <p:cNvPr id="1" name=""/>
+        <p:cNvGrpSpPr/>
+        <p:nvPr/>
+      </p:nvGrpSpPr>
+      <p:grpSpPr>
+        <a:xfrm>
+          <a:off x="0" y="0"/>
+          <a:ext cx="0" cy="0"/>
+          <a:chOff x="0" y="0"/>
+          <a:chExt cx="0" cy="0"/>
+        </a:xfrm>
+      </p:grpSpPr>
+      <p:sp>
+        <p:nvSpPr>
+          <p:cNvPr id="2" name="Slide Image Placeholder 1"/>
+          <p:cNvSpPr>
+            <a:spLocks noGrp="1"/>
+          </p:cNvSpPr>
+          <p:nvPr>
+            <p:ph type="sldImg" idx="2"/>
+          </p:nvPr>
+        </p:nvSpPr>
+        <p:spPr/>
+      </p:sp>
+      <p:sp>
+        <p:nvSpPr>
+          <p:cNvPr id="3" name="Notes Placeholder 2"/>
+          <p:cNvSpPr>
+            <a:spLocks noGrp="1"/>
+          </p:cNvSpPr>
+          <p:nvPr>
+            <p:ph type="body" idx="3" sz="quarter"/>
+          </p:nvPr>
+        </p:nvSpPr>
+        <p:spPr/>
+        <p:txBody>
+          <a:bodyPr/>
+          <a:lstStyle/>
+          <a:p>
+            <a:r>
+              <a:t>Concept diagram: Modernize loop.</a:t>
             </a:r>
           </a:p>
         </p:txBody>
@@ -4281,11 +4352,11 @@
         <p:spPr>
           <a:xfrm>
             <a:off x="841248" y="2395728"/>
-            <a:ext cx="5715000" cy="530352"/>
+            <a:ext cx="5138928" cy="786384"/>
           </a:xfrm>
           <a:prstGeom prst="roundRect">
             <a:avLst>
-              <a:gd name="adj" fmla="val 6000"/>
+              <a:gd name="adj" fmla="val 7000"/>
             </a:avLst>
           </a:prstGeom>
           <a:solidFill>
@@ -4320,9 +4391,55 @@
           </a:p>
         </p:txBody>
       </p:sp>
+      <p:sp>
+        <p:nvSpPr>
+          <p:cNvPr id="7" name="Rounded Rectangle 6"/>
+          <p:cNvSpPr/>
+          <p:nvPr/>
+        </p:nvSpPr>
+        <p:spPr>
+          <a:xfrm>
+            <a:off x="987552" y="2532888"/>
+            <a:ext cx="512064" cy="512064"/>
+          </a:xfrm>
+          <a:prstGeom prst="roundRect">
+            <a:avLst>
+              <a:gd name="adj" fmla="val 26000"/>
+            </a:avLst>
+          </a:prstGeom>
+          <a:solidFill>
+            <a:srgbClr val="EE0000"/>
+          </a:solidFill>
+          <a:ln>
+            <a:noFill/>
+          </a:ln>
+          <a:effectLst/>
+        </p:spPr>
+        <p:style>
+          <a:lnRef idx="1">
+            <a:schemeClr val="accent1"/>
+          </a:lnRef>
+          <a:fillRef idx="3">
+            <a:schemeClr val="accent1"/>
+          </a:fillRef>
+          <a:effectRef idx="2">
+            <a:schemeClr val="accent1"/>
+          </a:effectRef>
+          <a:fontRef idx="minor">
+            <a:schemeClr val="lt1"/>
+          </a:fontRef>
+        </p:style>
+        <p:txBody>
+          <a:bodyPr rtlCol="0" anchor="ctr"/>
+          <a:lstStyle/>
+          <a:p>
+            <a:pPr algn="ctr"/>
+          </a:p>
+        </p:txBody>
+      </p:sp>
       <p:pic>
         <p:nvPicPr>
-          <p:cNvPr id="7" name="Picture 6" descr="check_steel.png"/>
+          <p:cNvPr id="8" name="Picture 7" descr="check_white.png"/>
           <p:cNvPicPr>
             <a:picLocks noChangeAspect="1"/>
           </p:cNvPicPr>
@@ -4336,8 +4453,8 @@
         </p:blipFill>
         <p:spPr>
           <a:xfrm>
-            <a:off x="987552" y="2542032"/>
-            <a:ext cx="237744" cy="237744"/>
+            <a:off x="1110447" y="2655783"/>
+            <a:ext cx="266273" cy="266273"/>
           </a:xfrm>
           <a:prstGeom prst="rect">
             <a:avLst/>
@@ -4346,14 +4463,14 @@
       </p:pic>
       <p:sp>
         <p:nvSpPr>
-          <p:cNvPr id="8" name="TextBox 7"/>
+          <p:cNvPr id="9" name="TextBox 8"/>
           <p:cNvSpPr txBox="1"/>
           <p:nvPr/>
         </p:nvSpPr>
         <p:spPr>
           <a:xfrm>
-            <a:off x="1353312" y="2395728"/>
-            <a:ext cx="5029200" cy="530352"/>
+            <a:off x="1627632" y="2395728"/>
+            <a:ext cx="4206240" cy="786384"/>
           </a:xfrm>
           <a:prstGeom prst="rect">
             <a:avLst/>
@@ -4378,7 +4495,7 @@
               </a:spcAft>
             </a:pPr>
             <a:r>
-              <a:rPr sz="1200" b="0">
+              <a:rPr sz="1150" b="0">
                 <a:solidFill>
                   <a:srgbClr val="1A1A1A"/>
                 </a:solidFill>
@@ -4391,18 +4508,18 @@
       </p:sp>
       <p:sp>
         <p:nvSpPr>
-          <p:cNvPr id="9" name="Rounded Rectangle 8"/>
+          <p:cNvPr id="10" name="Rounded Rectangle 9"/>
           <p:cNvSpPr/>
           <p:nvPr/>
         </p:nvSpPr>
         <p:spPr>
           <a:xfrm>
-            <a:off x="841248" y="2999232"/>
-            <a:ext cx="5715000" cy="530352"/>
+            <a:off x="6254496" y="2395728"/>
+            <a:ext cx="5138928" cy="786384"/>
           </a:xfrm>
           <a:prstGeom prst="roundRect">
             <a:avLst>
-              <a:gd name="adj" fmla="val 6000"/>
+              <a:gd name="adj" fmla="val 7000"/>
             </a:avLst>
           </a:prstGeom>
           <a:solidFill>
@@ -4437,9 +4554,55 @@
           </a:p>
         </p:txBody>
       </p:sp>
+      <p:sp>
+        <p:nvSpPr>
+          <p:cNvPr id="11" name="Rounded Rectangle 10"/>
+          <p:cNvSpPr/>
+          <p:nvPr/>
+        </p:nvSpPr>
+        <p:spPr>
+          <a:xfrm>
+            <a:off x="6400800" y="2532888"/>
+            <a:ext cx="512064" cy="512064"/>
+          </a:xfrm>
+          <a:prstGeom prst="roundRect">
+            <a:avLst>
+              <a:gd name="adj" fmla="val 26000"/>
+            </a:avLst>
+          </a:prstGeom>
+          <a:solidFill>
+            <a:srgbClr val="EE0000"/>
+          </a:solidFill>
+          <a:ln>
+            <a:noFill/>
+          </a:ln>
+          <a:effectLst/>
+        </p:spPr>
+        <p:style>
+          <a:lnRef idx="1">
+            <a:schemeClr val="accent1"/>
+          </a:lnRef>
+          <a:fillRef idx="3">
+            <a:schemeClr val="accent1"/>
+          </a:fillRef>
+          <a:effectRef idx="2">
+            <a:schemeClr val="accent1"/>
+          </a:effectRef>
+          <a:fontRef idx="minor">
+            <a:schemeClr val="lt1"/>
+          </a:fontRef>
+        </p:style>
+        <p:txBody>
+          <a:bodyPr rtlCol="0" anchor="ctr"/>
+          <a:lstStyle/>
+          <a:p>
+            <a:pPr algn="ctr"/>
+          </a:p>
+        </p:txBody>
+      </p:sp>
       <p:pic>
         <p:nvPicPr>
-          <p:cNvPr id="10" name="Picture 9" descr="check_steel.png"/>
+          <p:cNvPr id="12" name="Picture 11" descr="check_white.png"/>
           <p:cNvPicPr>
             <a:picLocks noChangeAspect="1"/>
           </p:cNvPicPr>
@@ -4453,8 +4616,8 @@
         </p:blipFill>
         <p:spPr>
           <a:xfrm>
-            <a:off x="987552" y="3145536"/>
-            <a:ext cx="237744" cy="237744"/>
+            <a:off x="6523695" y="2655783"/>
+            <a:ext cx="266273" cy="266273"/>
           </a:xfrm>
           <a:prstGeom prst="rect">
             <a:avLst/>
@@ -4463,14 +4626,14 @@
       </p:pic>
       <p:sp>
         <p:nvSpPr>
-          <p:cNvPr id="11" name="TextBox 10"/>
+          <p:cNvPr id="13" name="TextBox 12"/>
           <p:cNvSpPr txBox="1"/>
           <p:nvPr/>
         </p:nvSpPr>
         <p:spPr>
           <a:xfrm>
-            <a:off x="1353312" y="2999232"/>
-            <a:ext cx="5029200" cy="530352"/>
+            <a:off x="7040880" y="2395728"/>
+            <a:ext cx="4206240" cy="786384"/>
           </a:xfrm>
           <a:prstGeom prst="rect">
             <a:avLst/>
@@ -4495,7 +4658,7 @@
               </a:spcAft>
             </a:pPr>
             <a:r>
-              <a:rPr sz="1200" b="0">
+              <a:rPr sz="1150" b="0">
                 <a:solidFill>
                   <a:srgbClr val="1A1A1A"/>
                 </a:solidFill>
@@ -4508,18 +4671,18 @@
       </p:sp>
       <p:sp>
         <p:nvSpPr>
-          <p:cNvPr id="12" name="Rounded Rectangle 11"/>
+          <p:cNvPr id="14" name="Rounded Rectangle 13"/>
           <p:cNvSpPr/>
           <p:nvPr/>
         </p:nvSpPr>
         <p:spPr>
           <a:xfrm>
-            <a:off x="841248" y="3602736"/>
-            <a:ext cx="5715000" cy="530352"/>
+            <a:off x="841248" y="3328416"/>
+            <a:ext cx="5138928" cy="786384"/>
           </a:xfrm>
           <a:prstGeom prst="roundRect">
             <a:avLst>
-              <a:gd name="adj" fmla="val 6000"/>
+              <a:gd name="adj" fmla="val 7000"/>
             </a:avLst>
           </a:prstGeom>
           <a:solidFill>
@@ -4554,9 +4717,55 @@
           </a:p>
         </p:txBody>
       </p:sp>
+      <p:sp>
+        <p:nvSpPr>
+          <p:cNvPr id="15" name="Rounded Rectangle 14"/>
+          <p:cNvSpPr/>
+          <p:nvPr/>
+        </p:nvSpPr>
+        <p:spPr>
+          <a:xfrm>
+            <a:off x="987552" y="3465576"/>
+            <a:ext cx="512064" cy="512064"/>
+          </a:xfrm>
+          <a:prstGeom prst="roundRect">
+            <a:avLst>
+              <a:gd name="adj" fmla="val 26000"/>
+            </a:avLst>
+          </a:prstGeom>
+          <a:solidFill>
+            <a:srgbClr val="EE0000"/>
+          </a:solidFill>
+          <a:ln>
+            <a:noFill/>
+          </a:ln>
+          <a:effectLst/>
+        </p:spPr>
+        <p:style>
+          <a:lnRef idx="1">
+            <a:schemeClr val="accent1"/>
+          </a:lnRef>
+          <a:fillRef idx="3">
+            <a:schemeClr val="accent1"/>
+          </a:fillRef>
+          <a:effectRef idx="2">
+            <a:schemeClr val="accent1"/>
+          </a:effectRef>
+          <a:fontRef idx="minor">
+            <a:schemeClr val="lt1"/>
+          </a:fontRef>
+        </p:style>
+        <p:txBody>
+          <a:bodyPr rtlCol="0" anchor="ctr"/>
+          <a:lstStyle/>
+          <a:p>
+            <a:pPr algn="ctr"/>
+          </a:p>
+        </p:txBody>
+      </p:sp>
       <p:pic>
         <p:nvPicPr>
-          <p:cNvPr id="13" name="Picture 12" descr="check_steel.png"/>
+          <p:cNvPr id="16" name="Picture 15" descr="check_white.png"/>
           <p:cNvPicPr>
             <a:picLocks noChangeAspect="1"/>
           </p:cNvPicPr>
@@ -4570,8 +4779,8 @@
         </p:blipFill>
         <p:spPr>
           <a:xfrm>
-            <a:off x="987552" y="3749040"/>
-            <a:ext cx="237744" cy="237744"/>
+            <a:off x="1110447" y="3588471"/>
+            <a:ext cx="266273" cy="266273"/>
           </a:xfrm>
           <a:prstGeom prst="rect">
             <a:avLst/>
@@ -4580,14 +4789,14 @@
       </p:pic>
       <p:sp>
         <p:nvSpPr>
-          <p:cNvPr id="14" name="TextBox 13"/>
+          <p:cNvPr id="17" name="TextBox 16"/>
           <p:cNvSpPr txBox="1"/>
           <p:nvPr/>
         </p:nvSpPr>
         <p:spPr>
           <a:xfrm>
-            <a:off x="1353312" y="3602736"/>
-            <a:ext cx="5029200" cy="530352"/>
+            <a:off x="1627632" y="3328416"/>
+            <a:ext cx="4206240" cy="786384"/>
           </a:xfrm>
           <a:prstGeom prst="rect">
             <a:avLst/>
@@ -4612,7 +4821,7 @@
               </a:spcAft>
             </a:pPr>
             <a:r>
-              <a:rPr sz="1200" b="0">
+              <a:rPr sz="1150" b="0">
                 <a:solidFill>
                   <a:srgbClr val="1A1A1A"/>
                 </a:solidFill>
@@ -4625,18 +4834,18 @@
       </p:sp>
       <p:sp>
         <p:nvSpPr>
-          <p:cNvPr id="15" name="Rounded Rectangle 14"/>
+          <p:cNvPr id="18" name="Rounded Rectangle 17"/>
           <p:cNvSpPr/>
           <p:nvPr/>
         </p:nvSpPr>
         <p:spPr>
           <a:xfrm>
-            <a:off x="841248" y="4206240"/>
-            <a:ext cx="5715000" cy="530352"/>
+            <a:off x="6254496" y="3328416"/>
+            <a:ext cx="5138928" cy="786384"/>
           </a:xfrm>
           <a:prstGeom prst="roundRect">
             <a:avLst>
-              <a:gd name="adj" fmla="val 6000"/>
+              <a:gd name="adj" fmla="val 7000"/>
             </a:avLst>
           </a:prstGeom>
           <a:solidFill>
@@ -4671,9 +4880,55 @@
           </a:p>
         </p:txBody>
       </p:sp>
+      <p:sp>
+        <p:nvSpPr>
+          <p:cNvPr id="19" name="Rounded Rectangle 18"/>
+          <p:cNvSpPr/>
+          <p:nvPr/>
+        </p:nvSpPr>
+        <p:spPr>
+          <a:xfrm>
+            <a:off x="6400800" y="3465576"/>
+            <a:ext cx="512064" cy="512064"/>
+          </a:xfrm>
+          <a:prstGeom prst="roundRect">
+            <a:avLst>
+              <a:gd name="adj" fmla="val 26000"/>
+            </a:avLst>
+          </a:prstGeom>
+          <a:solidFill>
+            <a:srgbClr val="EE0000"/>
+          </a:solidFill>
+          <a:ln>
+            <a:noFill/>
+          </a:ln>
+          <a:effectLst/>
+        </p:spPr>
+        <p:style>
+          <a:lnRef idx="1">
+            <a:schemeClr val="accent1"/>
+          </a:lnRef>
+          <a:fillRef idx="3">
+            <a:schemeClr val="accent1"/>
+          </a:fillRef>
+          <a:effectRef idx="2">
+            <a:schemeClr val="accent1"/>
+          </a:effectRef>
+          <a:fontRef idx="minor">
+            <a:schemeClr val="lt1"/>
+          </a:fontRef>
+        </p:style>
+        <p:txBody>
+          <a:bodyPr rtlCol="0" anchor="ctr"/>
+          <a:lstStyle/>
+          <a:p>
+            <a:pPr algn="ctr"/>
+          </a:p>
+        </p:txBody>
+      </p:sp>
       <p:pic>
         <p:nvPicPr>
-          <p:cNvPr id="16" name="Picture 15" descr="check_steel.png"/>
+          <p:cNvPr id="20" name="Picture 19" descr="check_white.png"/>
           <p:cNvPicPr>
             <a:picLocks noChangeAspect="1"/>
           </p:cNvPicPr>
@@ -4687,8 +4942,8 @@
         </p:blipFill>
         <p:spPr>
           <a:xfrm>
-            <a:off x="987552" y="4352544"/>
-            <a:ext cx="237744" cy="237744"/>
+            <a:off x="6523695" y="3588471"/>
+            <a:ext cx="266273" cy="266273"/>
           </a:xfrm>
           <a:prstGeom prst="rect">
             <a:avLst/>
@@ -4697,14 +4952,14 @@
       </p:pic>
       <p:sp>
         <p:nvSpPr>
-          <p:cNvPr id="17" name="TextBox 16"/>
+          <p:cNvPr id="21" name="TextBox 20"/>
           <p:cNvSpPr txBox="1"/>
           <p:nvPr/>
         </p:nvSpPr>
         <p:spPr>
           <a:xfrm>
-            <a:off x="1353312" y="4206240"/>
-            <a:ext cx="5029200" cy="530352"/>
+            <a:off x="7040880" y="3328416"/>
+            <a:ext cx="4206240" cy="786384"/>
           </a:xfrm>
           <a:prstGeom prst="rect">
             <a:avLst/>
@@ -4729,7 +4984,7 @@
               </a:spcAft>
             </a:pPr>
             <a:r>
-              <a:rPr sz="1200" b="0">
+              <a:rPr sz="1150" b="0">
                 <a:solidFill>
                   <a:srgbClr val="1A1A1A"/>
                 </a:solidFill>
@@ -4742,18 +4997,18 @@
       </p:sp>
       <p:sp>
         <p:nvSpPr>
-          <p:cNvPr id="18" name="Rounded Rectangle 17"/>
+          <p:cNvPr id="22" name="Rounded Rectangle 21"/>
           <p:cNvSpPr/>
           <p:nvPr/>
         </p:nvSpPr>
         <p:spPr>
           <a:xfrm>
-            <a:off x="841248" y="4809744"/>
-            <a:ext cx="5715000" cy="530352"/>
+            <a:off x="841248" y="4261104"/>
+            <a:ext cx="5138928" cy="786384"/>
           </a:xfrm>
           <a:prstGeom prst="roundRect">
             <a:avLst>
-              <a:gd name="adj" fmla="val 6000"/>
+              <a:gd name="adj" fmla="val 7000"/>
             </a:avLst>
           </a:prstGeom>
           <a:solidFill>
@@ -4788,9 +5043,55 @@
           </a:p>
         </p:txBody>
       </p:sp>
+      <p:sp>
+        <p:nvSpPr>
+          <p:cNvPr id="23" name="Rounded Rectangle 22"/>
+          <p:cNvSpPr/>
+          <p:nvPr/>
+        </p:nvSpPr>
+        <p:spPr>
+          <a:xfrm>
+            <a:off x="987552" y="4398264"/>
+            <a:ext cx="512064" cy="512064"/>
+          </a:xfrm>
+          <a:prstGeom prst="roundRect">
+            <a:avLst>
+              <a:gd name="adj" fmla="val 26000"/>
+            </a:avLst>
+          </a:prstGeom>
+          <a:solidFill>
+            <a:srgbClr val="EE0000"/>
+          </a:solidFill>
+          <a:ln>
+            <a:noFill/>
+          </a:ln>
+          <a:effectLst/>
+        </p:spPr>
+        <p:style>
+          <a:lnRef idx="1">
+            <a:schemeClr val="accent1"/>
+          </a:lnRef>
+          <a:fillRef idx="3">
+            <a:schemeClr val="accent1"/>
+          </a:fillRef>
+          <a:effectRef idx="2">
+            <a:schemeClr val="accent1"/>
+          </a:effectRef>
+          <a:fontRef idx="minor">
+            <a:schemeClr val="lt1"/>
+          </a:fontRef>
+        </p:style>
+        <p:txBody>
+          <a:bodyPr rtlCol="0" anchor="ctr"/>
+          <a:lstStyle/>
+          <a:p>
+            <a:pPr algn="ctr"/>
+          </a:p>
+        </p:txBody>
+      </p:sp>
       <p:pic>
         <p:nvPicPr>
-          <p:cNvPr id="19" name="Picture 18" descr="check_steel.png"/>
+          <p:cNvPr id="24" name="Picture 23" descr="check_white.png"/>
           <p:cNvPicPr>
             <a:picLocks noChangeAspect="1"/>
           </p:cNvPicPr>
@@ -4804,8 +5105,8 @@
         </p:blipFill>
         <p:spPr>
           <a:xfrm>
-            <a:off x="987552" y="4956048"/>
-            <a:ext cx="237744" cy="237744"/>
+            <a:off x="1110447" y="4521159"/>
+            <a:ext cx="266273" cy="266273"/>
           </a:xfrm>
           <a:prstGeom prst="rect">
             <a:avLst/>
@@ -4814,14 +5115,14 @@
       </p:pic>
       <p:sp>
         <p:nvSpPr>
-          <p:cNvPr id="20" name="TextBox 19"/>
+          <p:cNvPr id="25" name="TextBox 24"/>
           <p:cNvSpPr txBox="1"/>
           <p:nvPr/>
         </p:nvSpPr>
         <p:spPr>
           <a:xfrm>
-            <a:off x="1353312" y="4809744"/>
-            <a:ext cx="5029200" cy="530352"/>
+            <a:off x="1627632" y="4261104"/>
+            <a:ext cx="4206240" cy="786384"/>
           </a:xfrm>
           <a:prstGeom prst="rect">
             <a:avLst/>
@@ -4846,221 +5147,13 @@
               </a:spcAft>
             </a:pPr>
             <a:r>
-              <a:rPr sz="1200" b="0">
+              <a:rPr sz="1150" b="0">
                 <a:solidFill>
                   <a:srgbClr val="1A1A1A"/>
                 </a:solidFill>
                 <a:latin typeface="Red Hat Text"/>
               </a:rPr>
               <a:t>MTA reads the SOURCE and prices every blocker BEFORE you commit a sprint</a:t>
-            </a:r>
-          </a:p>
-        </p:txBody>
-      </p:sp>
-      <p:sp>
-        <p:nvSpPr>
-          <p:cNvPr id="21" name="Rounded Rectangle 20"/>
-          <p:cNvSpPr/>
-          <p:nvPr/>
-        </p:nvSpPr>
-        <p:spPr>
-          <a:xfrm>
-            <a:off x="6812280" y="2395728"/>
-            <a:ext cx="4538167" cy="2944368"/>
-          </a:xfrm>
-          <a:prstGeom prst="roundRect">
-            <a:avLst>
-              <a:gd name="adj" fmla="val 4000"/>
-            </a:avLst>
-          </a:prstGeom>
-          <a:solidFill>
-            <a:srgbClr val="FFFFFF"/>
-          </a:solidFill>
-          <a:ln w="15240">
-            <a:solidFill>
-              <a:srgbClr val="DDE1E6"/>
-            </a:solidFill>
-          </a:ln>
-          <a:effectLst/>
-        </p:spPr>
-        <p:style>
-          <a:lnRef idx="1">
-            <a:schemeClr val="accent1"/>
-          </a:lnRef>
-          <a:fillRef idx="3">
-            <a:schemeClr val="accent1"/>
-          </a:fillRef>
-          <a:effectRef idx="2">
-            <a:schemeClr val="accent1"/>
-          </a:effectRef>
-          <a:fontRef idx="minor">
-            <a:schemeClr val="lt1"/>
-          </a:fontRef>
-        </p:style>
-        <p:txBody>
-          <a:bodyPr rtlCol="0" anchor="ctr"/>
-          <a:lstStyle/>
-          <a:p>
-            <a:pPr algn="ctr"/>
-          </a:p>
-        </p:txBody>
-      </p:sp>
-      <p:sp>
-        <p:nvSpPr>
-          <p:cNvPr id="22" name="Rounded Rectangle 21"/>
-          <p:cNvSpPr/>
-          <p:nvPr/>
-        </p:nvSpPr>
-        <p:spPr>
-          <a:xfrm>
-            <a:off x="7013448" y="2596896"/>
-            <a:ext cx="1298448" cy="310896"/>
-          </a:xfrm>
-          <a:prstGeom prst="roundRect">
-            <a:avLst>
-              <a:gd name="adj" fmla="val 50000"/>
-            </a:avLst>
-          </a:prstGeom>
-          <a:solidFill>
-            <a:srgbClr val="FCECEC"/>
-          </a:solidFill>
-          <a:ln>
-            <a:noFill/>
-          </a:ln>
-          <a:effectLst/>
-        </p:spPr>
-        <p:style>
-          <a:lnRef idx="1">
-            <a:schemeClr val="accent1"/>
-          </a:lnRef>
-          <a:fillRef idx="3">
-            <a:schemeClr val="accent1"/>
-          </a:fillRef>
-          <a:effectRef idx="2">
-            <a:schemeClr val="accent1"/>
-          </a:effectRef>
-          <a:fontRef idx="minor">
-            <a:schemeClr val="lt1"/>
-          </a:fontRef>
-        </p:style>
-        <p:txBody>
-          <a:bodyPr rtlCol="0" anchor="ctr"/>
-          <a:lstStyle/>
-          <a:p>
-            <a:pPr algn="ctr"/>
-          </a:p>
-        </p:txBody>
-      </p:sp>
-      <p:sp>
-        <p:nvSpPr>
-          <p:cNvPr id="23" name="TextBox 22"/>
-          <p:cNvSpPr txBox="1"/>
-          <p:nvPr/>
-        </p:nvSpPr>
-        <p:spPr>
-          <a:xfrm>
-            <a:off x="7013448" y="2596896"/>
-            <a:ext cx="1298448" cy="310896"/>
-          </a:xfrm>
-          <a:prstGeom prst="rect">
-            <a:avLst/>
-          </a:prstGeom>
-          <a:noFill/>
-        </p:spPr>
-        <p:txBody>
-          <a:bodyPr wrap="none" anchor="ctr" lIns="0" rIns="0" tIns="0" bIns="0">
-            <a:spAutoFit/>
-          </a:bodyPr>
-          <a:lstStyle/>
-          <a:p>
-            <a:pPr algn="ctr">
-              <a:lnSpc>
-                <a:spcPct val="106000"/>
-              </a:lnSpc>
-              <a:spcBef>
-                <a:spcPts val="0"/>
-              </a:spcBef>
-              <a:spcAft>
-                <a:spcPts val="0"/>
-              </a:spcAft>
-            </a:pPr>
-            <a:r>
-              <a:rPr sz="850" b="1">
-                <a:solidFill>
-                  <a:srgbClr val="B80000"/>
-                </a:solidFill>
-                <a:latin typeface="Red Hat Display"/>
-              </a:rPr>
-              <a:t>MEDIA PASS</a:t>
-            </a:r>
-          </a:p>
-        </p:txBody>
-      </p:sp>
-      <p:pic>
-        <p:nvPicPr>
-          <p:cNvPr id="24" name="Picture 23" descr="eye_slate.png"/>
-          <p:cNvPicPr>
-            <a:picLocks noChangeAspect="1"/>
-          </p:cNvPicPr>
-          <p:nvPr/>
-        </p:nvPicPr>
-        <p:blipFill>
-          <a:blip r:embed="rId4"/>
-          <a:stretch>
-            <a:fillRect/>
-          </a:stretch>
-        </p:blipFill>
-        <p:spPr>
-          <a:xfrm>
-            <a:off x="8843619" y="3108960"/>
-            <a:ext cx="475488" cy="475488"/>
-          </a:xfrm>
-          <a:prstGeom prst="rect">
-            <a:avLst/>
-          </a:prstGeom>
-        </p:spPr>
-      </p:pic>
-      <p:sp>
-        <p:nvSpPr>
-          <p:cNvPr id="25" name="TextBox 24"/>
-          <p:cNvSpPr txBox="1"/>
-          <p:nvPr/>
-        </p:nvSpPr>
-        <p:spPr>
-          <a:xfrm>
-            <a:off x="7050024" y="3721608"/>
-            <a:ext cx="4062679" cy="1481328"/>
-          </a:xfrm>
-          <a:prstGeom prst="rect">
-            <a:avLst/>
-          </a:prstGeom>
-          <a:noFill/>
-        </p:spPr>
-        <p:txBody>
-          <a:bodyPr wrap="square" anchor="t" lIns="0" rIns="0" tIns="0" bIns="0">
-            <a:spAutoFit/>
-          </a:bodyPr>
-          <a:lstStyle/>
-          <a:p>
-            <a:pPr algn="l">
-              <a:lnSpc>
-                <a:spcPct val="120000"/>
-              </a:lnSpc>
-              <a:spcBef>
-                <a:spcPts val="0"/>
-              </a:spcBef>
-              <a:spcAft>
-                <a:spcPts val="0"/>
-              </a:spcAft>
-            </a:pPr>
-            <a:r>
-              <a:rPr sz="950" b="0">
-                <a:solidFill>
-                  <a:srgbClr val="8A9099"/>
-                </a:solidFill>
-                <a:latin typeface="Red Hat Text"/>
-              </a:rPr>
-              <a:t>Left panel "Lift-and-shift" — a WAR box being dropped into a container, with three red call-outs pinned to it: "hardcoded DB IP + password," "writes /opt/parasol/logs/... (can't)," "needs Tomcat (not here)." Right panel "MTA" — the same source feeding an analyzer that emits a tidy report card with a "24 story points · 6 mandatory" badge. Arrow between: "measure before you move."</a:t>
             </a:r>
           </a:p>
         </p:txBody>
@@ -5368,11 +5461,11 @@
         <p:spPr>
           <a:xfrm>
             <a:off x="841248" y="2395728"/>
-            <a:ext cx="5715000" cy="530352"/>
+            <a:ext cx="5138928" cy="786384"/>
           </a:xfrm>
           <a:prstGeom prst="roundRect">
             <a:avLst>
-              <a:gd name="adj" fmla="val 6000"/>
+              <a:gd name="adj" fmla="val 7000"/>
             </a:avLst>
           </a:prstGeom>
           <a:solidFill>
@@ -5407,9 +5500,55 @@
           </a:p>
         </p:txBody>
       </p:sp>
+      <p:sp>
+        <p:nvSpPr>
+          <p:cNvPr id="7" name="Rounded Rectangle 6"/>
+          <p:cNvSpPr/>
+          <p:nvPr/>
+        </p:nvSpPr>
+        <p:spPr>
+          <a:xfrm>
+            <a:off x="987552" y="2532888"/>
+            <a:ext cx="512064" cy="512064"/>
+          </a:xfrm>
+          <a:prstGeom prst="roundRect">
+            <a:avLst>
+              <a:gd name="adj" fmla="val 26000"/>
+            </a:avLst>
+          </a:prstGeom>
+          <a:solidFill>
+            <a:srgbClr val="EE0000"/>
+          </a:solidFill>
+          <a:ln>
+            <a:noFill/>
+          </a:ln>
+          <a:effectLst/>
+        </p:spPr>
+        <p:style>
+          <a:lnRef idx="1">
+            <a:schemeClr val="accent1"/>
+          </a:lnRef>
+          <a:fillRef idx="3">
+            <a:schemeClr val="accent1"/>
+          </a:fillRef>
+          <a:effectRef idx="2">
+            <a:schemeClr val="accent1"/>
+          </a:effectRef>
+          <a:fontRef idx="minor">
+            <a:schemeClr val="lt1"/>
+          </a:fontRef>
+        </p:style>
+        <p:txBody>
+          <a:bodyPr rtlCol="0" anchor="ctr"/>
+          <a:lstStyle/>
+          <a:p>
+            <a:pPr algn="ctr"/>
+          </a:p>
+        </p:txBody>
+      </p:sp>
       <p:pic>
         <p:nvPicPr>
-          <p:cNvPr id="7" name="Picture 6" descr="check_steel.png"/>
+          <p:cNvPr id="8" name="Picture 7" descr="check_white.png"/>
           <p:cNvPicPr>
             <a:picLocks noChangeAspect="1"/>
           </p:cNvPicPr>
@@ -5423,8 +5562,8 @@
         </p:blipFill>
         <p:spPr>
           <a:xfrm>
-            <a:off x="987552" y="2542032"/>
-            <a:ext cx="237744" cy="237744"/>
+            <a:off x="1110447" y="2655783"/>
+            <a:ext cx="266273" cy="266273"/>
           </a:xfrm>
           <a:prstGeom prst="rect">
             <a:avLst/>
@@ -5433,14 +5572,14 @@
       </p:pic>
       <p:sp>
         <p:nvSpPr>
-          <p:cNvPr id="8" name="TextBox 7"/>
+          <p:cNvPr id="9" name="TextBox 8"/>
           <p:cNvSpPr txBox="1"/>
           <p:nvPr/>
         </p:nvSpPr>
         <p:spPr>
           <a:xfrm>
-            <a:off x="1353312" y="2395728"/>
-            <a:ext cx="5029200" cy="530352"/>
+            <a:off x="1627632" y="2395728"/>
+            <a:ext cx="4206240" cy="786384"/>
           </a:xfrm>
           <a:prstGeom prst="rect">
             <a:avLst/>
@@ -5465,7 +5604,7 @@
               </a:spcAft>
             </a:pPr>
             <a:r>
-              <a:rPr sz="1200" b="0">
+              <a:rPr sz="1150" b="0">
                 <a:solidFill>
                   <a:srgbClr val="1A1A1A"/>
                 </a:solidFill>
@@ -5478,18 +5617,18 @@
       </p:sp>
       <p:sp>
         <p:nvSpPr>
-          <p:cNvPr id="9" name="Rounded Rectangle 8"/>
+          <p:cNvPr id="10" name="Rounded Rectangle 9"/>
           <p:cNvSpPr/>
           <p:nvPr/>
         </p:nvSpPr>
         <p:spPr>
           <a:xfrm>
-            <a:off x="841248" y="2999232"/>
-            <a:ext cx="5715000" cy="530352"/>
+            <a:off x="6254496" y="2395728"/>
+            <a:ext cx="5138928" cy="786384"/>
           </a:xfrm>
           <a:prstGeom prst="roundRect">
             <a:avLst>
-              <a:gd name="adj" fmla="val 6000"/>
+              <a:gd name="adj" fmla="val 7000"/>
             </a:avLst>
           </a:prstGeom>
           <a:solidFill>
@@ -5524,9 +5663,55 @@
           </a:p>
         </p:txBody>
       </p:sp>
+      <p:sp>
+        <p:nvSpPr>
+          <p:cNvPr id="11" name="Rounded Rectangle 10"/>
+          <p:cNvSpPr/>
+          <p:nvPr/>
+        </p:nvSpPr>
+        <p:spPr>
+          <a:xfrm>
+            <a:off x="6400800" y="2532888"/>
+            <a:ext cx="512064" cy="512064"/>
+          </a:xfrm>
+          <a:prstGeom prst="roundRect">
+            <a:avLst>
+              <a:gd name="adj" fmla="val 26000"/>
+            </a:avLst>
+          </a:prstGeom>
+          <a:solidFill>
+            <a:srgbClr val="EE0000"/>
+          </a:solidFill>
+          <a:ln>
+            <a:noFill/>
+          </a:ln>
+          <a:effectLst/>
+        </p:spPr>
+        <p:style>
+          <a:lnRef idx="1">
+            <a:schemeClr val="accent1"/>
+          </a:lnRef>
+          <a:fillRef idx="3">
+            <a:schemeClr val="accent1"/>
+          </a:fillRef>
+          <a:effectRef idx="2">
+            <a:schemeClr val="accent1"/>
+          </a:effectRef>
+          <a:fontRef idx="minor">
+            <a:schemeClr val="lt1"/>
+          </a:fontRef>
+        </p:style>
+        <p:txBody>
+          <a:bodyPr rtlCol="0" anchor="ctr"/>
+          <a:lstStyle/>
+          <a:p>
+            <a:pPr algn="ctr"/>
+          </a:p>
+        </p:txBody>
+      </p:sp>
       <p:pic>
         <p:nvPicPr>
-          <p:cNvPr id="10" name="Picture 9" descr="check_steel.png"/>
+          <p:cNvPr id="12" name="Picture 11" descr="check_white.png"/>
           <p:cNvPicPr>
             <a:picLocks noChangeAspect="1"/>
           </p:cNvPicPr>
@@ -5540,8 +5725,8 @@
         </p:blipFill>
         <p:spPr>
           <a:xfrm>
-            <a:off x="987552" y="3145536"/>
-            <a:ext cx="237744" cy="237744"/>
+            <a:off x="6523695" y="2655783"/>
+            <a:ext cx="266273" cy="266273"/>
           </a:xfrm>
           <a:prstGeom prst="rect">
             <a:avLst/>
@@ -5550,14 +5735,14 @@
       </p:pic>
       <p:sp>
         <p:nvSpPr>
-          <p:cNvPr id="11" name="TextBox 10"/>
+          <p:cNvPr id="13" name="TextBox 12"/>
           <p:cNvSpPr txBox="1"/>
           <p:nvPr/>
         </p:nvSpPr>
         <p:spPr>
           <a:xfrm>
-            <a:off x="1353312" y="2999232"/>
-            <a:ext cx="5029200" cy="530352"/>
+            <a:off x="7040880" y="2395728"/>
+            <a:ext cx="4206240" cy="786384"/>
           </a:xfrm>
           <a:prstGeom prst="rect">
             <a:avLst/>
@@ -5582,7 +5767,7 @@
               </a:spcAft>
             </a:pPr>
             <a:r>
-              <a:rPr sz="1200" b="0">
+              <a:rPr sz="1150" b="0">
                 <a:solidFill>
                   <a:srgbClr val="1A1A1A"/>
                 </a:solidFill>
@@ -5595,18 +5780,18 @@
       </p:sp>
       <p:sp>
         <p:nvSpPr>
-          <p:cNvPr id="12" name="Rounded Rectangle 11"/>
+          <p:cNvPr id="14" name="Rounded Rectangle 13"/>
           <p:cNvSpPr/>
           <p:nvPr/>
         </p:nvSpPr>
         <p:spPr>
           <a:xfrm>
-            <a:off x="841248" y="3602736"/>
-            <a:ext cx="5715000" cy="530352"/>
+            <a:off x="841248" y="3328416"/>
+            <a:ext cx="5138928" cy="786384"/>
           </a:xfrm>
           <a:prstGeom prst="roundRect">
             <a:avLst>
-              <a:gd name="adj" fmla="val 6000"/>
+              <a:gd name="adj" fmla="val 7000"/>
             </a:avLst>
           </a:prstGeom>
           <a:solidFill>
@@ -5641,9 +5826,55 @@
           </a:p>
         </p:txBody>
       </p:sp>
+      <p:sp>
+        <p:nvSpPr>
+          <p:cNvPr id="15" name="Rounded Rectangle 14"/>
+          <p:cNvSpPr/>
+          <p:nvPr/>
+        </p:nvSpPr>
+        <p:spPr>
+          <a:xfrm>
+            <a:off x="987552" y="3465576"/>
+            <a:ext cx="512064" cy="512064"/>
+          </a:xfrm>
+          <a:prstGeom prst="roundRect">
+            <a:avLst>
+              <a:gd name="adj" fmla="val 26000"/>
+            </a:avLst>
+          </a:prstGeom>
+          <a:solidFill>
+            <a:srgbClr val="EE0000"/>
+          </a:solidFill>
+          <a:ln>
+            <a:noFill/>
+          </a:ln>
+          <a:effectLst/>
+        </p:spPr>
+        <p:style>
+          <a:lnRef idx="1">
+            <a:schemeClr val="accent1"/>
+          </a:lnRef>
+          <a:fillRef idx="3">
+            <a:schemeClr val="accent1"/>
+          </a:fillRef>
+          <a:effectRef idx="2">
+            <a:schemeClr val="accent1"/>
+          </a:effectRef>
+          <a:fontRef idx="minor">
+            <a:schemeClr val="lt1"/>
+          </a:fontRef>
+        </p:style>
+        <p:txBody>
+          <a:bodyPr rtlCol="0" anchor="ctr"/>
+          <a:lstStyle/>
+          <a:p>
+            <a:pPr algn="ctr"/>
+          </a:p>
+        </p:txBody>
+      </p:sp>
       <p:pic>
         <p:nvPicPr>
-          <p:cNvPr id="13" name="Picture 12" descr="check_steel.png"/>
+          <p:cNvPr id="16" name="Picture 15" descr="check_white.png"/>
           <p:cNvPicPr>
             <a:picLocks noChangeAspect="1"/>
           </p:cNvPicPr>
@@ -5657,8 +5888,8 @@
         </p:blipFill>
         <p:spPr>
           <a:xfrm>
-            <a:off x="987552" y="3749040"/>
-            <a:ext cx="237744" cy="237744"/>
+            <a:off x="1110447" y="3588471"/>
+            <a:ext cx="266273" cy="266273"/>
           </a:xfrm>
           <a:prstGeom prst="rect">
             <a:avLst/>
@@ -5667,14 +5898,14 @@
       </p:pic>
       <p:sp>
         <p:nvSpPr>
-          <p:cNvPr id="14" name="TextBox 13"/>
+          <p:cNvPr id="17" name="TextBox 16"/>
           <p:cNvSpPr txBox="1"/>
           <p:nvPr/>
         </p:nvSpPr>
         <p:spPr>
           <a:xfrm>
-            <a:off x="1353312" y="3602736"/>
-            <a:ext cx="5029200" cy="530352"/>
+            <a:off x="1627632" y="3328416"/>
+            <a:ext cx="4206240" cy="786384"/>
           </a:xfrm>
           <a:prstGeom prst="rect">
             <a:avLst/>
@@ -5699,7 +5930,7 @@
               </a:spcAft>
             </a:pPr>
             <a:r>
-              <a:rPr sz="1200" b="0">
+              <a:rPr sz="1150" b="0">
                 <a:solidFill>
                   <a:srgbClr val="1A1A1A"/>
                 </a:solidFill>
@@ -5712,18 +5943,18 @@
       </p:sp>
       <p:sp>
         <p:nvSpPr>
-          <p:cNvPr id="15" name="Rounded Rectangle 14"/>
+          <p:cNvPr id="18" name="Rounded Rectangle 17"/>
           <p:cNvSpPr/>
           <p:nvPr/>
         </p:nvSpPr>
         <p:spPr>
           <a:xfrm>
-            <a:off x="841248" y="4206240"/>
-            <a:ext cx="5715000" cy="530352"/>
+            <a:off x="6254496" y="3328416"/>
+            <a:ext cx="5138928" cy="786384"/>
           </a:xfrm>
           <a:prstGeom prst="roundRect">
             <a:avLst>
-              <a:gd name="adj" fmla="val 6000"/>
+              <a:gd name="adj" fmla="val 7000"/>
             </a:avLst>
           </a:prstGeom>
           <a:solidFill>
@@ -5758,9 +5989,55 @@
           </a:p>
         </p:txBody>
       </p:sp>
+      <p:sp>
+        <p:nvSpPr>
+          <p:cNvPr id="19" name="Rounded Rectangle 18"/>
+          <p:cNvSpPr/>
+          <p:nvPr/>
+        </p:nvSpPr>
+        <p:spPr>
+          <a:xfrm>
+            <a:off x="6400800" y="3465576"/>
+            <a:ext cx="512064" cy="512064"/>
+          </a:xfrm>
+          <a:prstGeom prst="roundRect">
+            <a:avLst>
+              <a:gd name="adj" fmla="val 26000"/>
+            </a:avLst>
+          </a:prstGeom>
+          <a:solidFill>
+            <a:srgbClr val="EE0000"/>
+          </a:solidFill>
+          <a:ln>
+            <a:noFill/>
+          </a:ln>
+          <a:effectLst/>
+        </p:spPr>
+        <p:style>
+          <a:lnRef idx="1">
+            <a:schemeClr val="accent1"/>
+          </a:lnRef>
+          <a:fillRef idx="3">
+            <a:schemeClr val="accent1"/>
+          </a:fillRef>
+          <a:effectRef idx="2">
+            <a:schemeClr val="accent1"/>
+          </a:effectRef>
+          <a:fontRef idx="minor">
+            <a:schemeClr val="lt1"/>
+          </a:fontRef>
+        </p:style>
+        <p:txBody>
+          <a:bodyPr rtlCol="0" anchor="ctr"/>
+          <a:lstStyle/>
+          <a:p>
+            <a:pPr algn="ctr"/>
+          </a:p>
+        </p:txBody>
+      </p:sp>
       <p:pic>
         <p:nvPicPr>
-          <p:cNvPr id="16" name="Picture 15" descr="check_steel.png"/>
+          <p:cNvPr id="20" name="Picture 19" descr="check_white.png"/>
           <p:cNvPicPr>
             <a:picLocks noChangeAspect="1"/>
           </p:cNvPicPr>
@@ -5774,8 +6051,8 @@
         </p:blipFill>
         <p:spPr>
           <a:xfrm>
-            <a:off x="987552" y="4352544"/>
-            <a:ext cx="237744" cy="237744"/>
+            <a:off x="6523695" y="3588471"/>
+            <a:ext cx="266273" cy="266273"/>
           </a:xfrm>
           <a:prstGeom prst="rect">
             <a:avLst/>
@@ -5784,14 +6061,14 @@
       </p:pic>
       <p:sp>
         <p:nvSpPr>
-          <p:cNvPr id="17" name="TextBox 16"/>
+          <p:cNvPr id="21" name="TextBox 20"/>
           <p:cNvSpPr txBox="1"/>
           <p:nvPr/>
         </p:nvSpPr>
         <p:spPr>
           <a:xfrm>
-            <a:off x="1353312" y="4206240"/>
-            <a:ext cx="5029200" cy="530352"/>
+            <a:off x="7040880" y="3328416"/>
+            <a:ext cx="4206240" cy="786384"/>
           </a:xfrm>
           <a:prstGeom prst="rect">
             <a:avLst/>
@@ -5816,7 +6093,7 @@
               </a:spcAft>
             </a:pPr>
             <a:r>
-              <a:rPr sz="1200" b="0">
+              <a:rPr sz="1150" b="0">
                 <a:solidFill>
                   <a:srgbClr val="1A1A1A"/>
                 </a:solidFill>
@@ -5829,18 +6106,18 @@
       </p:sp>
       <p:sp>
         <p:nvSpPr>
-          <p:cNvPr id="18" name="Rounded Rectangle 17"/>
+          <p:cNvPr id="22" name="Rounded Rectangle 21"/>
           <p:cNvSpPr/>
           <p:nvPr/>
         </p:nvSpPr>
         <p:spPr>
           <a:xfrm>
-            <a:off x="841248" y="4809744"/>
-            <a:ext cx="5715000" cy="530352"/>
+            <a:off x="841248" y="4261104"/>
+            <a:ext cx="5138928" cy="786384"/>
           </a:xfrm>
           <a:prstGeom prst="roundRect">
             <a:avLst>
-              <a:gd name="adj" fmla="val 6000"/>
+              <a:gd name="adj" fmla="val 7000"/>
             </a:avLst>
           </a:prstGeom>
           <a:solidFill>
@@ -5875,9 +6152,55 @@
           </a:p>
         </p:txBody>
       </p:sp>
+      <p:sp>
+        <p:nvSpPr>
+          <p:cNvPr id="23" name="Rounded Rectangle 22"/>
+          <p:cNvSpPr/>
+          <p:nvPr/>
+        </p:nvSpPr>
+        <p:spPr>
+          <a:xfrm>
+            <a:off x="987552" y="4398264"/>
+            <a:ext cx="512064" cy="512064"/>
+          </a:xfrm>
+          <a:prstGeom prst="roundRect">
+            <a:avLst>
+              <a:gd name="adj" fmla="val 26000"/>
+            </a:avLst>
+          </a:prstGeom>
+          <a:solidFill>
+            <a:srgbClr val="EE0000"/>
+          </a:solidFill>
+          <a:ln>
+            <a:noFill/>
+          </a:ln>
+          <a:effectLst/>
+        </p:spPr>
+        <p:style>
+          <a:lnRef idx="1">
+            <a:schemeClr val="accent1"/>
+          </a:lnRef>
+          <a:fillRef idx="3">
+            <a:schemeClr val="accent1"/>
+          </a:fillRef>
+          <a:effectRef idx="2">
+            <a:schemeClr val="accent1"/>
+          </a:effectRef>
+          <a:fontRef idx="minor">
+            <a:schemeClr val="lt1"/>
+          </a:fontRef>
+        </p:style>
+        <p:txBody>
+          <a:bodyPr rtlCol="0" anchor="ctr"/>
+          <a:lstStyle/>
+          <a:p>
+            <a:pPr algn="ctr"/>
+          </a:p>
+        </p:txBody>
+      </p:sp>
       <p:pic>
         <p:nvPicPr>
-          <p:cNvPr id="19" name="Picture 18" descr="check_steel.png"/>
+          <p:cNvPr id="24" name="Picture 23" descr="check_white.png"/>
           <p:cNvPicPr>
             <a:picLocks noChangeAspect="1"/>
           </p:cNvPicPr>
@@ -5891,8 +6214,8 @@
         </p:blipFill>
         <p:spPr>
           <a:xfrm>
-            <a:off x="987552" y="4956048"/>
-            <a:ext cx="237744" cy="237744"/>
+            <a:off x="1110447" y="4521159"/>
+            <a:ext cx="266273" cy="266273"/>
           </a:xfrm>
           <a:prstGeom prst="rect">
             <a:avLst/>
@@ -5901,14 +6224,14 @@
       </p:pic>
       <p:sp>
         <p:nvSpPr>
-          <p:cNvPr id="20" name="TextBox 19"/>
+          <p:cNvPr id="25" name="TextBox 24"/>
           <p:cNvSpPr txBox="1"/>
           <p:nvPr/>
         </p:nvSpPr>
         <p:spPr>
           <a:xfrm>
-            <a:off x="1353312" y="4809744"/>
-            <a:ext cx="5029200" cy="530352"/>
+            <a:off x="1627632" y="4261104"/>
+            <a:ext cx="4206240" cy="786384"/>
           </a:xfrm>
           <a:prstGeom prst="rect">
             <a:avLst/>
@@ -5933,221 +6256,13 @@
               </a:spcAft>
             </a:pPr>
             <a:r>
-              <a:rPr sz="1200" b="0">
+              <a:rPr sz="1150" b="0">
                 <a:solidFill>
                   <a:srgbClr val="1A1A1A"/>
                 </a:solidFill>
                 <a:latin typeface="Red Hat Text"/>
               </a:rPr>
               <a:t>parasol-legacy-claims = replatform-leaning-refactor</a:t>
-            </a:r>
-          </a:p>
-        </p:txBody>
-      </p:sp>
-      <p:sp>
-        <p:nvSpPr>
-          <p:cNvPr id="21" name="Rounded Rectangle 20"/>
-          <p:cNvSpPr/>
-          <p:nvPr/>
-        </p:nvSpPr>
-        <p:spPr>
-          <a:xfrm>
-            <a:off x="6812280" y="2395728"/>
-            <a:ext cx="4538167" cy="2944368"/>
-          </a:xfrm>
-          <a:prstGeom prst="roundRect">
-            <a:avLst>
-              <a:gd name="adj" fmla="val 4000"/>
-            </a:avLst>
-          </a:prstGeom>
-          <a:solidFill>
-            <a:srgbClr val="FFFFFF"/>
-          </a:solidFill>
-          <a:ln w="15240">
-            <a:solidFill>
-              <a:srgbClr val="DDE1E6"/>
-            </a:solidFill>
-          </a:ln>
-          <a:effectLst/>
-        </p:spPr>
-        <p:style>
-          <a:lnRef idx="1">
-            <a:schemeClr val="accent1"/>
-          </a:lnRef>
-          <a:fillRef idx="3">
-            <a:schemeClr val="accent1"/>
-          </a:fillRef>
-          <a:effectRef idx="2">
-            <a:schemeClr val="accent1"/>
-          </a:effectRef>
-          <a:fontRef idx="minor">
-            <a:schemeClr val="lt1"/>
-          </a:fontRef>
-        </p:style>
-        <p:txBody>
-          <a:bodyPr rtlCol="0" anchor="ctr"/>
-          <a:lstStyle/>
-          <a:p>
-            <a:pPr algn="ctr"/>
-          </a:p>
-        </p:txBody>
-      </p:sp>
-      <p:sp>
-        <p:nvSpPr>
-          <p:cNvPr id="22" name="Rounded Rectangle 21"/>
-          <p:cNvSpPr/>
-          <p:nvPr/>
-        </p:nvSpPr>
-        <p:spPr>
-          <a:xfrm>
-            <a:off x="7013448" y="2596896"/>
-            <a:ext cx="1298448" cy="310896"/>
-          </a:xfrm>
-          <a:prstGeom prst="roundRect">
-            <a:avLst>
-              <a:gd name="adj" fmla="val 50000"/>
-            </a:avLst>
-          </a:prstGeom>
-          <a:solidFill>
-            <a:srgbClr val="FCECEC"/>
-          </a:solidFill>
-          <a:ln>
-            <a:noFill/>
-          </a:ln>
-          <a:effectLst/>
-        </p:spPr>
-        <p:style>
-          <a:lnRef idx="1">
-            <a:schemeClr val="accent1"/>
-          </a:lnRef>
-          <a:fillRef idx="3">
-            <a:schemeClr val="accent1"/>
-          </a:fillRef>
-          <a:effectRef idx="2">
-            <a:schemeClr val="accent1"/>
-          </a:effectRef>
-          <a:fontRef idx="minor">
-            <a:schemeClr val="lt1"/>
-          </a:fontRef>
-        </p:style>
-        <p:txBody>
-          <a:bodyPr rtlCol="0" anchor="ctr"/>
-          <a:lstStyle/>
-          <a:p>
-            <a:pPr algn="ctr"/>
-          </a:p>
-        </p:txBody>
-      </p:sp>
-      <p:sp>
-        <p:nvSpPr>
-          <p:cNvPr id="23" name="TextBox 22"/>
-          <p:cNvSpPr txBox="1"/>
-          <p:nvPr/>
-        </p:nvSpPr>
-        <p:spPr>
-          <a:xfrm>
-            <a:off x="7013448" y="2596896"/>
-            <a:ext cx="1298448" cy="310896"/>
-          </a:xfrm>
-          <a:prstGeom prst="rect">
-            <a:avLst/>
-          </a:prstGeom>
-          <a:noFill/>
-        </p:spPr>
-        <p:txBody>
-          <a:bodyPr wrap="none" anchor="ctr" lIns="0" rIns="0" tIns="0" bIns="0">
-            <a:spAutoFit/>
-          </a:bodyPr>
-          <a:lstStyle/>
-          <a:p>
-            <a:pPr algn="ctr">
-              <a:lnSpc>
-                <a:spcPct val="106000"/>
-              </a:lnSpc>
-              <a:spcBef>
-                <a:spcPts val="0"/>
-              </a:spcBef>
-              <a:spcAft>
-                <a:spcPts val="0"/>
-              </a:spcAft>
-            </a:pPr>
-            <a:r>
-              <a:rPr sz="850" b="1">
-                <a:solidFill>
-                  <a:srgbClr val="B80000"/>
-                </a:solidFill>
-                <a:latin typeface="Red Hat Display"/>
-              </a:rPr>
-              <a:t>MEDIA PASS</a:t>
-            </a:r>
-          </a:p>
-        </p:txBody>
-      </p:sp>
-      <p:pic>
-        <p:nvPicPr>
-          <p:cNvPr id="24" name="Picture 23" descr="eye_slate.png"/>
-          <p:cNvPicPr>
-            <a:picLocks noChangeAspect="1"/>
-          </p:cNvPicPr>
-          <p:nvPr/>
-        </p:nvPicPr>
-        <p:blipFill>
-          <a:blip r:embed="rId4"/>
-          <a:stretch>
-            <a:fillRect/>
-          </a:stretch>
-        </p:blipFill>
-        <p:spPr>
-          <a:xfrm>
-            <a:off x="8843619" y="3108960"/>
-            <a:ext cx="475488" cy="475488"/>
-          </a:xfrm>
-          <a:prstGeom prst="rect">
-            <a:avLst/>
-          </a:prstGeom>
-        </p:spPr>
-      </p:pic>
-      <p:sp>
-        <p:nvSpPr>
-          <p:cNvPr id="25" name="TextBox 24"/>
-          <p:cNvSpPr txBox="1"/>
-          <p:nvPr/>
-        </p:nvSpPr>
-        <p:spPr>
-          <a:xfrm>
-            <a:off x="7050024" y="3721608"/>
-            <a:ext cx="4062679" cy="1481328"/>
-          </a:xfrm>
-          <a:prstGeom prst="rect">
-            <a:avLst/>
-          </a:prstGeom>
-          <a:noFill/>
-        </p:spPr>
-        <p:txBody>
-          <a:bodyPr wrap="square" anchor="t" lIns="0" rIns="0" tIns="0" bIns="0">
-            <a:spAutoFit/>
-          </a:bodyPr>
-          <a:lstStyle/>
-          <a:p>
-            <a:pPr algn="l">
-              <a:lnSpc>
-                <a:spcPct val="120000"/>
-              </a:lnSpc>
-              <a:spcBef>
-                <a:spcPts val="0"/>
-              </a:spcBef>
-              <a:spcAft>
-                <a:spcPts val="0"/>
-              </a:spcAft>
-            </a:pPr>
-            <a:r>
-              <a:rPr sz="950" b="0">
-                <a:solidFill>
-                  <a:srgbClr val="8A9099"/>
-                </a:solidFill>
-                <a:latin typeface="Red Hat Text"/>
-              </a:rPr>
-              <a:t>A 2×3 grid of the six Rs, each a card with a one-line "when it's right" and a tiny Parasol example. The Replatform card is highlighted; a marker pin labeled "parasol-legacy-claims" sits on the Replatform↔Refactor boundary.</a:t>
             </a:r>
           </a:p>
         </p:txBody>
@@ -6455,7 +6570,7 @@
         <p:spPr>
           <a:xfrm>
             <a:off x="841248" y="2395728"/>
-            <a:ext cx="5715000" cy="530352"/>
+            <a:ext cx="4160520" cy="475488"/>
           </a:xfrm>
           <a:prstGeom prst="roundRect">
             <a:avLst>
@@ -6510,8 +6625,8 @@
         </p:blipFill>
         <p:spPr>
           <a:xfrm>
-            <a:off x="987552" y="2542032"/>
-            <a:ext cx="237744" cy="237744"/>
+            <a:off x="969264" y="2532888"/>
+            <a:ext cx="201168" cy="201168"/>
           </a:xfrm>
           <a:prstGeom prst="rect">
             <a:avLst/>
@@ -6526,8 +6641,8 @@
         </p:nvSpPr>
         <p:spPr>
           <a:xfrm>
-            <a:off x="1353312" y="2395728"/>
-            <a:ext cx="5029200" cy="530352"/>
+            <a:off x="1280160" y="2395728"/>
+            <a:ext cx="3593591" cy="475488"/>
           </a:xfrm>
           <a:prstGeom prst="rect">
             <a:avLst/>
@@ -6552,7 +6667,7 @@
               </a:spcAft>
             </a:pPr>
             <a:r>
-              <a:rPr sz="1200" b="0">
+              <a:rPr sz="1050" b="0">
                 <a:solidFill>
                   <a:srgbClr val="1A1A1A"/>
                 </a:solidFill>
@@ -6571,8 +6686,8 @@
         </p:nvSpPr>
         <p:spPr>
           <a:xfrm>
-            <a:off x="841248" y="2999232"/>
-            <a:ext cx="5715000" cy="530352"/>
+            <a:off x="841248" y="2944368"/>
+            <a:ext cx="4160520" cy="475488"/>
           </a:xfrm>
           <a:prstGeom prst="roundRect">
             <a:avLst>
@@ -6627,8 +6742,8 @@
         </p:blipFill>
         <p:spPr>
           <a:xfrm>
-            <a:off x="987552" y="3145536"/>
-            <a:ext cx="237744" cy="237744"/>
+            <a:off x="969264" y="3081528"/>
+            <a:ext cx="201168" cy="201168"/>
           </a:xfrm>
           <a:prstGeom prst="rect">
             <a:avLst/>
@@ -6643,8 +6758,8 @@
         </p:nvSpPr>
         <p:spPr>
           <a:xfrm>
-            <a:off x="1353312" y="2999232"/>
-            <a:ext cx="5029200" cy="530352"/>
+            <a:off x="1280160" y="2944368"/>
+            <a:ext cx="3593591" cy="475488"/>
           </a:xfrm>
           <a:prstGeom prst="rect">
             <a:avLst/>
@@ -6669,7 +6784,7 @@
               </a:spcAft>
             </a:pPr>
             <a:r>
-              <a:rPr sz="1200" b="0">
+              <a:rPr sz="1050" b="0">
                 <a:solidFill>
                   <a:srgbClr val="1A1A1A"/>
                 </a:solidFill>
@@ -6688,8 +6803,8 @@
         </p:nvSpPr>
         <p:spPr>
           <a:xfrm>
-            <a:off x="841248" y="3602736"/>
-            <a:ext cx="5715000" cy="530352"/>
+            <a:off x="841248" y="3493008"/>
+            <a:ext cx="4160520" cy="475488"/>
           </a:xfrm>
           <a:prstGeom prst="roundRect">
             <a:avLst>
@@ -6744,8 +6859,8 @@
         </p:blipFill>
         <p:spPr>
           <a:xfrm>
-            <a:off x="987552" y="3749040"/>
-            <a:ext cx="237744" cy="237744"/>
+            <a:off x="969264" y="3630168"/>
+            <a:ext cx="201168" cy="201168"/>
           </a:xfrm>
           <a:prstGeom prst="rect">
             <a:avLst/>
@@ -6760,8 +6875,8 @@
         </p:nvSpPr>
         <p:spPr>
           <a:xfrm>
-            <a:off x="1353312" y="3602736"/>
-            <a:ext cx="5029200" cy="530352"/>
+            <a:off x="1280160" y="3493008"/>
+            <a:ext cx="3593591" cy="475488"/>
           </a:xfrm>
           <a:prstGeom prst="rect">
             <a:avLst/>
@@ -6786,7 +6901,7 @@
               </a:spcAft>
             </a:pPr>
             <a:r>
-              <a:rPr sz="1200" b="0">
+              <a:rPr sz="1050" b="0">
                 <a:solidFill>
                   <a:srgbClr val="1A1A1A"/>
                 </a:solidFill>
@@ -6805,8 +6920,8 @@
         </p:nvSpPr>
         <p:spPr>
           <a:xfrm>
-            <a:off x="841248" y="4206240"/>
-            <a:ext cx="5715000" cy="530352"/>
+            <a:off x="841248" y="4041648"/>
+            <a:ext cx="4160520" cy="475488"/>
           </a:xfrm>
           <a:prstGeom prst="roundRect">
             <a:avLst>
@@ -6861,8 +6976,8 @@
         </p:blipFill>
         <p:spPr>
           <a:xfrm>
-            <a:off x="987552" y="4352544"/>
-            <a:ext cx="237744" cy="237744"/>
+            <a:off x="969264" y="4178807"/>
+            <a:ext cx="201168" cy="201168"/>
           </a:xfrm>
           <a:prstGeom prst="rect">
             <a:avLst/>
@@ -6877,8 +6992,8 @@
         </p:nvSpPr>
         <p:spPr>
           <a:xfrm>
-            <a:off x="1353312" y="4206240"/>
-            <a:ext cx="5029200" cy="530352"/>
+            <a:off x="1280160" y="4041648"/>
+            <a:ext cx="3593591" cy="475488"/>
           </a:xfrm>
           <a:prstGeom prst="rect">
             <a:avLst/>
@@ -6903,7 +7018,7 @@
               </a:spcAft>
             </a:pPr>
             <a:r>
-              <a:rPr sz="1200" b="0">
+              <a:rPr sz="1050" b="0">
                 <a:solidFill>
                   <a:srgbClr val="1A1A1A"/>
                 </a:solidFill>
@@ -6922,8 +7037,8 @@
         </p:nvSpPr>
         <p:spPr>
           <a:xfrm>
-            <a:off x="841248" y="4809744"/>
-            <a:ext cx="5715000" cy="530352"/>
+            <a:off x="841248" y="4590288"/>
+            <a:ext cx="4160520" cy="475488"/>
           </a:xfrm>
           <a:prstGeom prst="roundRect">
             <a:avLst>
@@ -6978,8 +7093,8 @@
         </p:blipFill>
         <p:spPr>
           <a:xfrm>
-            <a:off x="987552" y="4956048"/>
-            <a:ext cx="237744" cy="237744"/>
+            <a:off x="969264" y="4727447"/>
+            <a:ext cx="201168" cy="201168"/>
           </a:xfrm>
           <a:prstGeom prst="rect">
             <a:avLst/>
@@ -6994,8 +7109,8 @@
         </p:nvSpPr>
         <p:spPr>
           <a:xfrm>
-            <a:off x="1353312" y="4809744"/>
-            <a:ext cx="5029200" cy="530352"/>
+            <a:off x="1280160" y="4590288"/>
+            <a:ext cx="3593591" cy="475488"/>
           </a:xfrm>
           <a:prstGeom prst="rect">
             <a:avLst/>
@@ -7020,7 +7135,7 @@
               </a:spcAft>
             </a:pPr>
             <a:r>
-              <a:rPr sz="1200" b="0">
+              <a:rPr sz="1050" b="0">
                 <a:solidFill>
                   <a:srgbClr val="1A1A1A"/>
                 </a:solidFill>
@@ -7039,8 +7154,8 @@
         </p:nvSpPr>
         <p:spPr>
           <a:xfrm>
-            <a:off x="6812280" y="2395728"/>
-            <a:ext cx="4538167" cy="2944368"/>
+            <a:off x="5385816" y="3163717"/>
+            <a:ext cx="5964631" cy="1207221"/>
           </a:xfrm>
           <a:prstGeom prst="roundRect">
             <a:avLst>
@@ -7079,100 +7194,9 @@
           </a:p>
         </p:txBody>
       </p:sp>
-      <p:sp>
-        <p:nvSpPr>
-          <p:cNvPr id="22" name="Rounded Rectangle 21"/>
-          <p:cNvSpPr/>
-          <p:nvPr/>
-        </p:nvSpPr>
-        <p:spPr>
-          <a:xfrm>
-            <a:off x="7013448" y="2596896"/>
-            <a:ext cx="1298448" cy="310896"/>
-          </a:xfrm>
-          <a:prstGeom prst="roundRect">
-            <a:avLst>
-              <a:gd name="adj" fmla="val 50000"/>
-            </a:avLst>
-          </a:prstGeom>
-          <a:solidFill>
-            <a:srgbClr val="FCECEC"/>
-          </a:solidFill>
-          <a:ln>
-            <a:noFill/>
-          </a:ln>
-          <a:effectLst/>
-        </p:spPr>
-        <p:style>
-          <a:lnRef idx="1">
-            <a:schemeClr val="accent1"/>
-          </a:lnRef>
-          <a:fillRef idx="3">
-            <a:schemeClr val="accent1"/>
-          </a:fillRef>
-          <a:effectRef idx="2">
-            <a:schemeClr val="accent1"/>
-          </a:effectRef>
-          <a:fontRef idx="minor">
-            <a:schemeClr val="lt1"/>
-          </a:fontRef>
-        </p:style>
-        <p:txBody>
-          <a:bodyPr rtlCol="0" anchor="ctr"/>
-          <a:lstStyle/>
-          <a:p>
-            <a:pPr algn="ctr"/>
-          </a:p>
-        </p:txBody>
-      </p:sp>
-      <p:sp>
-        <p:nvSpPr>
-          <p:cNvPr id="23" name="TextBox 22"/>
-          <p:cNvSpPr txBox="1"/>
-          <p:nvPr/>
-        </p:nvSpPr>
-        <p:spPr>
-          <a:xfrm>
-            <a:off x="7013448" y="2596896"/>
-            <a:ext cx="1298448" cy="310896"/>
-          </a:xfrm>
-          <a:prstGeom prst="rect">
-            <a:avLst/>
-          </a:prstGeom>
-          <a:noFill/>
-        </p:spPr>
-        <p:txBody>
-          <a:bodyPr wrap="none" anchor="ctr" lIns="0" rIns="0" tIns="0" bIns="0">
-            <a:spAutoFit/>
-          </a:bodyPr>
-          <a:lstStyle/>
-          <a:p>
-            <a:pPr algn="ctr">
-              <a:lnSpc>
-                <a:spcPct val="106000"/>
-              </a:lnSpc>
-              <a:spcBef>
-                <a:spcPts val="0"/>
-              </a:spcBef>
-              <a:spcAft>
-                <a:spcPts val="0"/>
-              </a:spcAft>
-            </a:pPr>
-            <a:r>
-              <a:rPr sz="850" b="1">
-                <a:solidFill>
-                  <a:srgbClr val="B80000"/>
-                </a:solidFill>
-                <a:latin typeface="Red Hat Display"/>
-              </a:rPr>
-              <a:t>MEDIA PASS</a:t>
-            </a:r>
-          </a:p>
-        </p:txBody>
-      </p:sp>
       <p:pic>
         <p:nvPicPr>
-          <p:cNvPr id="24" name="Picture 23" descr="eye_slate.png"/>
+          <p:cNvPr id="22" name="Picture 21" descr="01-mta-flow.png"/>
           <p:cNvPicPr>
             <a:picLocks noChangeAspect="1"/>
           </p:cNvPicPr>
@@ -7186,62 +7210,17 @@
         </p:blipFill>
         <p:spPr>
           <a:xfrm>
-            <a:off x="8843619" y="3108960"/>
-            <a:ext cx="475488" cy="475488"/>
+            <a:off x="5532120" y="3310021"/>
+            <a:ext cx="5672023" cy="914613"/>
           </a:xfrm>
           <a:prstGeom prst="rect">
             <a:avLst/>
           </a:prstGeom>
         </p:spPr>
       </p:pic>
-      <p:sp>
-        <p:nvSpPr>
-          <p:cNvPr id="25" name="TextBox 24"/>
-          <p:cNvSpPr txBox="1"/>
-          <p:nvPr/>
-        </p:nvSpPr>
-        <p:spPr>
-          <a:xfrm>
-            <a:off x="7050024" y="3721608"/>
-            <a:ext cx="4062679" cy="1481328"/>
-          </a:xfrm>
-          <a:prstGeom prst="rect">
-            <a:avLst/>
-          </a:prstGeom>
-          <a:noFill/>
-        </p:spPr>
-        <p:txBody>
-          <a:bodyPr wrap="square" anchor="t" lIns="0" rIns="0" tIns="0" bIns="0">
-            <a:spAutoFit/>
-          </a:bodyPr>
-          <a:lstStyle/>
-          <a:p>
-            <a:pPr algn="l">
-              <a:lnSpc>
-                <a:spcPct val="120000"/>
-              </a:lnSpc>
-              <a:spcBef>
-                <a:spcPts val="0"/>
-              </a:spcBef>
-              <a:spcAft>
-                <a:spcPts val="0"/>
-              </a:spcAft>
-            </a:pPr>
-            <a:r>
-              <a:rPr sz="950" b="0">
-                <a:solidFill>
-                  <a:srgbClr val="8A9099"/>
-                </a:solidFill>
-                <a:latin typeface="Red Hat Text"/>
-              </a:rPr>
-              <a:t>The concept diagram app-modernization-01-mta-flow.svg — the Git source + the target chips feeding the analyzer addon in the shared Hub, emitting a report (issues + effort) to "you," who loop through a Dev Spaces + Developer Lightspeed fix back to the source.</a:t>
-            </a:r>
-          </a:p>
-        </p:txBody>
-      </p:sp>
       <p:cxnSp>
         <p:nvCxnSpPr>
-          <p:cNvPr id="26" name="Connector 25"/>
+          <p:cNvPr id="23" name="Connector 22"/>
           <p:cNvCxnSpPr/>
           <p:nvPr/>
         </p:nvCxnSpPr>
@@ -7277,7 +7256,7 @@
       </p:cxnSp>
       <p:sp>
         <p:nvSpPr>
-          <p:cNvPr id="27" name="TextBox 26"/>
+          <p:cNvPr id="24" name="TextBox 23"/>
           <p:cNvSpPr txBox="1"/>
           <p:nvPr/>
         </p:nvSpPr>
@@ -7322,7 +7301,7 @@
       </p:sp>
       <p:sp>
         <p:nvSpPr>
-          <p:cNvPr id="28" name="TextBox 27"/>
+          <p:cNvPr id="25" name="TextBox 24"/>
           <p:cNvSpPr txBox="1"/>
           <p:nvPr/>
         </p:nvSpPr>
@@ -7542,11 +7521,11 @@
         <p:spPr>
           <a:xfrm>
             <a:off x="841248" y="2395728"/>
-            <a:ext cx="5715000" cy="530352"/>
+            <a:ext cx="5138928" cy="786384"/>
           </a:xfrm>
           <a:prstGeom prst="roundRect">
             <a:avLst>
-              <a:gd name="adj" fmla="val 6000"/>
+              <a:gd name="adj" fmla="val 7000"/>
             </a:avLst>
           </a:prstGeom>
           <a:solidFill>
@@ -7581,9 +7560,55 @@
           </a:p>
         </p:txBody>
       </p:sp>
+      <p:sp>
+        <p:nvSpPr>
+          <p:cNvPr id="7" name="Rounded Rectangle 6"/>
+          <p:cNvSpPr/>
+          <p:nvPr/>
+        </p:nvSpPr>
+        <p:spPr>
+          <a:xfrm>
+            <a:off x="987552" y="2532888"/>
+            <a:ext cx="512064" cy="512064"/>
+          </a:xfrm>
+          <a:prstGeom prst="roundRect">
+            <a:avLst>
+              <a:gd name="adj" fmla="val 26000"/>
+            </a:avLst>
+          </a:prstGeom>
+          <a:solidFill>
+            <a:srgbClr val="EE0000"/>
+          </a:solidFill>
+          <a:ln>
+            <a:noFill/>
+          </a:ln>
+          <a:effectLst/>
+        </p:spPr>
+        <p:style>
+          <a:lnRef idx="1">
+            <a:schemeClr val="accent1"/>
+          </a:lnRef>
+          <a:fillRef idx="3">
+            <a:schemeClr val="accent1"/>
+          </a:fillRef>
+          <a:effectRef idx="2">
+            <a:schemeClr val="accent1"/>
+          </a:effectRef>
+          <a:fontRef idx="minor">
+            <a:schemeClr val="lt1"/>
+          </a:fontRef>
+        </p:style>
+        <p:txBody>
+          <a:bodyPr rtlCol="0" anchor="ctr"/>
+          <a:lstStyle/>
+          <a:p>
+            <a:pPr algn="ctr"/>
+          </a:p>
+        </p:txBody>
+      </p:sp>
       <p:pic>
         <p:nvPicPr>
-          <p:cNvPr id="7" name="Picture 6" descr="check_steel.png"/>
+          <p:cNvPr id="8" name="Picture 7" descr="check_white.png"/>
           <p:cNvPicPr>
             <a:picLocks noChangeAspect="1"/>
           </p:cNvPicPr>
@@ -7597,8 +7622,8 @@
         </p:blipFill>
         <p:spPr>
           <a:xfrm>
-            <a:off x="987552" y="2542032"/>
-            <a:ext cx="237744" cy="237744"/>
+            <a:off x="1110447" y="2655783"/>
+            <a:ext cx="266273" cy="266273"/>
           </a:xfrm>
           <a:prstGeom prst="rect">
             <a:avLst/>
@@ -7607,14 +7632,14 @@
       </p:pic>
       <p:sp>
         <p:nvSpPr>
-          <p:cNvPr id="8" name="TextBox 7"/>
+          <p:cNvPr id="9" name="TextBox 8"/>
           <p:cNvSpPr txBox="1"/>
           <p:nvPr/>
         </p:nvSpPr>
         <p:spPr>
           <a:xfrm>
-            <a:off x="1353312" y="2395728"/>
-            <a:ext cx="5029200" cy="530352"/>
+            <a:off x="1627632" y="2395728"/>
+            <a:ext cx="4206240" cy="786384"/>
           </a:xfrm>
           <a:prstGeom prst="rect">
             <a:avLst/>
@@ -7639,7 +7664,7 @@
               </a:spcAft>
             </a:pPr>
             <a:r>
-              <a:rPr sz="1200" b="0">
+              <a:rPr sz="1150" b="0">
                 <a:solidFill>
                   <a:srgbClr val="1A1A1A"/>
                 </a:solidFill>
@@ -7652,18 +7677,18 @@
       </p:sp>
       <p:sp>
         <p:nvSpPr>
-          <p:cNvPr id="9" name="Rounded Rectangle 8"/>
+          <p:cNvPr id="10" name="Rounded Rectangle 9"/>
           <p:cNvSpPr/>
           <p:nvPr/>
         </p:nvSpPr>
         <p:spPr>
           <a:xfrm>
-            <a:off x="841248" y="2999232"/>
-            <a:ext cx="5715000" cy="530352"/>
+            <a:off x="6254496" y="2395728"/>
+            <a:ext cx="5138928" cy="786384"/>
           </a:xfrm>
           <a:prstGeom prst="roundRect">
             <a:avLst>
-              <a:gd name="adj" fmla="val 6000"/>
+              <a:gd name="adj" fmla="val 7000"/>
             </a:avLst>
           </a:prstGeom>
           <a:solidFill>
@@ -7698,9 +7723,55 @@
           </a:p>
         </p:txBody>
       </p:sp>
+      <p:sp>
+        <p:nvSpPr>
+          <p:cNvPr id="11" name="Rounded Rectangle 10"/>
+          <p:cNvSpPr/>
+          <p:nvPr/>
+        </p:nvSpPr>
+        <p:spPr>
+          <a:xfrm>
+            <a:off x="6400800" y="2532888"/>
+            <a:ext cx="512064" cy="512064"/>
+          </a:xfrm>
+          <a:prstGeom prst="roundRect">
+            <a:avLst>
+              <a:gd name="adj" fmla="val 26000"/>
+            </a:avLst>
+          </a:prstGeom>
+          <a:solidFill>
+            <a:srgbClr val="EE0000"/>
+          </a:solidFill>
+          <a:ln>
+            <a:noFill/>
+          </a:ln>
+          <a:effectLst/>
+        </p:spPr>
+        <p:style>
+          <a:lnRef idx="1">
+            <a:schemeClr val="accent1"/>
+          </a:lnRef>
+          <a:fillRef idx="3">
+            <a:schemeClr val="accent1"/>
+          </a:fillRef>
+          <a:effectRef idx="2">
+            <a:schemeClr val="accent1"/>
+          </a:effectRef>
+          <a:fontRef idx="minor">
+            <a:schemeClr val="lt1"/>
+          </a:fontRef>
+        </p:style>
+        <p:txBody>
+          <a:bodyPr rtlCol="0" anchor="ctr"/>
+          <a:lstStyle/>
+          <a:p>
+            <a:pPr algn="ctr"/>
+          </a:p>
+        </p:txBody>
+      </p:sp>
       <p:pic>
         <p:nvPicPr>
-          <p:cNvPr id="10" name="Picture 9" descr="check_steel.png"/>
+          <p:cNvPr id="12" name="Picture 11" descr="check_white.png"/>
           <p:cNvPicPr>
             <a:picLocks noChangeAspect="1"/>
           </p:cNvPicPr>
@@ -7714,8 +7785,8 @@
         </p:blipFill>
         <p:spPr>
           <a:xfrm>
-            <a:off x="987552" y="3145536"/>
-            <a:ext cx="237744" cy="237744"/>
+            <a:off x="6523695" y="2655783"/>
+            <a:ext cx="266273" cy="266273"/>
           </a:xfrm>
           <a:prstGeom prst="rect">
             <a:avLst/>
@@ -7724,14 +7795,14 @@
       </p:pic>
       <p:sp>
         <p:nvSpPr>
-          <p:cNvPr id="11" name="TextBox 10"/>
+          <p:cNvPr id="13" name="TextBox 12"/>
           <p:cNvSpPr txBox="1"/>
           <p:nvPr/>
         </p:nvSpPr>
         <p:spPr>
           <a:xfrm>
-            <a:off x="1353312" y="2999232"/>
-            <a:ext cx="5029200" cy="530352"/>
+            <a:off x="7040880" y="2395728"/>
+            <a:ext cx="4206240" cy="786384"/>
           </a:xfrm>
           <a:prstGeom prst="rect">
             <a:avLst/>
@@ -7756,7 +7827,7 @@
               </a:spcAft>
             </a:pPr>
             <a:r>
-              <a:rPr sz="1200" b="0">
+              <a:rPr sz="1150" b="0">
                 <a:solidFill>
                   <a:srgbClr val="1A1A1A"/>
                 </a:solidFill>
@@ -7769,18 +7840,18 @@
       </p:sp>
       <p:sp>
         <p:nvSpPr>
-          <p:cNvPr id="12" name="Rounded Rectangle 11"/>
+          <p:cNvPr id="14" name="Rounded Rectangle 13"/>
           <p:cNvSpPr/>
           <p:nvPr/>
         </p:nvSpPr>
         <p:spPr>
           <a:xfrm>
-            <a:off x="841248" y="3602736"/>
-            <a:ext cx="5715000" cy="530352"/>
+            <a:off x="841248" y="3328416"/>
+            <a:ext cx="5138928" cy="786384"/>
           </a:xfrm>
           <a:prstGeom prst="roundRect">
             <a:avLst>
-              <a:gd name="adj" fmla="val 6000"/>
+              <a:gd name="adj" fmla="val 7000"/>
             </a:avLst>
           </a:prstGeom>
           <a:solidFill>
@@ -7815,9 +7886,55 @@
           </a:p>
         </p:txBody>
       </p:sp>
+      <p:sp>
+        <p:nvSpPr>
+          <p:cNvPr id="15" name="Rounded Rectangle 14"/>
+          <p:cNvSpPr/>
+          <p:nvPr/>
+        </p:nvSpPr>
+        <p:spPr>
+          <a:xfrm>
+            <a:off x="987552" y="3465576"/>
+            <a:ext cx="512064" cy="512064"/>
+          </a:xfrm>
+          <a:prstGeom prst="roundRect">
+            <a:avLst>
+              <a:gd name="adj" fmla="val 26000"/>
+            </a:avLst>
+          </a:prstGeom>
+          <a:solidFill>
+            <a:srgbClr val="EE0000"/>
+          </a:solidFill>
+          <a:ln>
+            <a:noFill/>
+          </a:ln>
+          <a:effectLst/>
+        </p:spPr>
+        <p:style>
+          <a:lnRef idx="1">
+            <a:schemeClr val="accent1"/>
+          </a:lnRef>
+          <a:fillRef idx="3">
+            <a:schemeClr val="accent1"/>
+          </a:fillRef>
+          <a:effectRef idx="2">
+            <a:schemeClr val="accent1"/>
+          </a:effectRef>
+          <a:fontRef idx="minor">
+            <a:schemeClr val="lt1"/>
+          </a:fontRef>
+        </p:style>
+        <p:txBody>
+          <a:bodyPr rtlCol="0" anchor="ctr"/>
+          <a:lstStyle/>
+          <a:p>
+            <a:pPr algn="ctr"/>
+          </a:p>
+        </p:txBody>
+      </p:sp>
       <p:pic>
         <p:nvPicPr>
-          <p:cNvPr id="13" name="Picture 12" descr="check_steel.png"/>
+          <p:cNvPr id="16" name="Picture 15" descr="check_white.png"/>
           <p:cNvPicPr>
             <a:picLocks noChangeAspect="1"/>
           </p:cNvPicPr>
@@ -7831,8 +7948,8 @@
         </p:blipFill>
         <p:spPr>
           <a:xfrm>
-            <a:off x="987552" y="3749040"/>
-            <a:ext cx="237744" cy="237744"/>
+            <a:off x="1110447" y="3588471"/>
+            <a:ext cx="266273" cy="266273"/>
           </a:xfrm>
           <a:prstGeom prst="rect">
             <a:avLst/>
@@ -7841,14 +7958,14 @@
       </p:pic>
       <p:sp>
         <p:nvSpPr>
-          <p:cNvPr id="14" name="TextBox 13"/>
+          <p:cNvPr id="17" name="TextBox 16"/>
           <p:cNvSpPr txBox="1"/>
           <p:nvPr/>
         </p:nvSpPr>
         <p:spPr>
           <a:xfrm>
-            <a:off x="1353312" y="3602736"/>
-            <a:ext cx="5029200" cy="530352"/>
+            <a:off x="1627632" y="3328416"/>
+            <a:ext cx="4206240" cy="786384"/>
           </a:xfrm>
           <a:prstGeom prst="rect">
             <a:avLst/>
@@ -7873,7 +7990,7 @@
               </a:spcAft>
             </a:pPr>
             <a:r>
-              <a:rPr sz="1200" b="0">
+              <a:rPr sz="1150" b="0">
                 <a:solidFill>
                   <a:srgbClr val="1A1A1A"/>
                 </a:solidFill>
@@ -7886,18 +8003,18 @@
       </p:sp>
       <p:sp>
         <p:nvSpPr>
-          <p:cNvPr id="15" name="Rounded Rectangle 14"/>
+          <p:cNvPr id="18" name="Rounded Rectangle 17"/>
           <p:cNvSpPr/>
           <p:nvPr/>
         </p:nvSpPr>
         <p:spPr>
           <a:xfrm>
-            <a:off x="841248" y="4206240"/>
-            <a:ext cx="5715000" cy="530352"/>
+            <a:off x="6254496" y="3328416"/>
+            <a:ext cx="5138928" cy="786384"/>
           </a:xfrm>
           <a:prstGeom prst="roundRect">
             <a:avLst>
-              <a:gd name="adj" fmla="val 6000"/>
+              <a:gd name="adj" fmla="val 7000"/>
             </a:avLst>
           </a:prstGeom>
           <a:solidFill>
@@ -7932,9 +8049,55 @@
           </a:p>
         </p:txBody>
       </p:sp>
+      <p:sp>
+        <p:nvSpPr>
+          <p:cNvPr id="19" name="Rounded Rectangle 18"/>
+          <p:cNvSpPr/>
+          <p:nvPr/>
+        </p:nvSpPr>
+        <p:spPr>
+          <a:xfrm>
+            <a:off x="6400800" y="3465576"/>
+            <a:ext cx="512064" cy="512064"/>
+          </a:xfrm>
+          <a:prstGeom prst="roundRect">
+            <a:avLst>
+              <a:gd name="adj" fmla="val 26000"/>
+            </a:avLst>
+          </a:prstGeom>
+          <a:solidFill>
+            <a:srgbClr val="EE0000"/>
+          </a:solidFill>
+          <a:ln>
+            <a:noFill/>
+          </a:ln>
+          <a:effectLst/>
+        </p:spPr>
+        <p:style>
+          <a:lnRef idx="1">
+            <a:schemeClr val="accent1"/>
+          </a:lnRef>
+          <a:fillRef idx="3">
+            <a:schemeClr val="accent1"/>
+          </a:fillRef>
+          <a:effectRef idx="2">
+            <a:schemeClr val="accent1"/>
+          </a:effectRef>
+          <a:fontRef idx="minor">
+            <a:schemeClr val="lt1"/>
+          </a:fontRef>
+        </p:style>
+        <p:txBody>
+          <a:bodyPr rtlCol="0" anchor="ctr"/>
+          <a:lstStyle/>
+          <a:p>
+            <a:pPr algn="ctr"/>
+          </a:p>
+        </p:txBody>
+      </p:sp>
       <p:pic>
         <p:nvPicPr>
-          <p:cNvPr id="16" name="Picture 15" descr="check_steel.png"/>
+          <p:cNvPr id="20" name="Picture 19" descr="check_white.png"/>
           <p:cNvPicPr>
             <a:picLocks noChangeAspect="1"/>
           </p:cNvPicPr>
@@ -7948,8 +8111,8 @@
         </p:blipFill>
         <p:spPr>
           <a:xfrm>
-            <a:off x="987552" y="4352544"/>
-            <a:ext cx="237744" cy="237744"/>
+            <a:off x="6523695" y="3588471"/>
+            <a:ext cx="266273" cy="266273"/>
           </a:xfrm>
           <a:prstGeom prst="rect">
             <a:avLst/>
@@ -7958,14 +8121,14 @@
       </p:pic>
       <p:sp>
         <p:nvSpPr>
-          <p:cNvPr id="17" name="TextBox 16"/>
+          <p:cNvPr id="21" name="TextBox 20"/>
           <p:cNvSpPr txBox="1"/>
           <p:nvPr/>
         </p:nvSpPr>
         <p:spPr>
           <a:xfrm>
-            <a:off x="1353312" y="4206240"/>
-            <a:ext cx="5029200" cy="530352"/>
+            <a:off x="7040880" y="3328416"/>
+            <a:ext cx="4206240" cy="786384"/>
           </a:xfrm>
           <a:prstGeom prst="rect">
             <a:avLst/>
@@ -7990,7 +8153,7 @@
               </a:spcAft>
             </a:pPr>
             <a:r>
-              <a:rPr sz="1200" b="0">
+              <a:rPr sz="1150" b="0">
                 <a:solidFill>
                   <a:srgbClr val="1A1A1A"/>
                 </a:solidFill>
@@ -8003,18 +8166,18 @@
       </p:sp>
       <p:sp>
         <p:nvSpPr>
-          <p:cNvPr id="18" name="Rounded Rectangle 17"/>
+          <p:cNvPr id="22" name="Rounded Rectangle 21"/>
           <p:cNvSpPr/>
           <p:nvPr/>
         </p:nvSpPr>
         <p:spPr>
           <a:xfrm>
-            <a:off x="841248" y="4809744"/>
-            <a:ext cx="5715000" cy="530352"/>
+            <a:off x="841248" y="4261104"/>
+            <a:ext cx="5138928" cy="786384"/>
           </a:xfrm>
           <a:prstGeom prst="roundRect">
             <a:avLst>
-              <a:gd name="adj" fmla="val 6000"/>
+              <a:gd name="adj" fmla="val 7000"/>
             </a:avLst>
           </a:prstGeom>
           <a:solidFill>
@@ -8049,9 +8212,55 @@
           </a:p>
         </p:txBody>
       </p:sp>
+      <p:sp>
+        <p:nvSpPr>
+          <p:cNvPr id="23" name="Rounded Rectangle 22"/>
+          <p:cNvSpPr/>
+          <p:nvPr/>
+        </p:nvSpPr>
+        <p:spPr>
+          <a:xfrm>
+            <a:off x="987552" y="4398264"/>
+            <a:ext cx="512064" cy="512064"/>
+          </a:xfrm>
+          <a:prstGeom prst="roundRect">
+            <a:avLst>
+              <a:gd name="adj" fmla="val 26000"/>
+            </a:avLst>
+          </a:prstGeom>
+          <a:solidFill>
+            <a:srgbClr val="EE0000"/>
+          </a:solidFill>
+          <a:ln>
+            <a:noFill/>
+          </a:ln>
+          <a:effectLst/>
+        </p:spPr>
+        <p:style>
+          <a:lnRef idx="1">
+            <a:schemeClr val="accent1"/>
+          </a:lnRef>
+          <a:fillRef idx="3">
+            <a:schemeClr val="accent1"/>
+          </a:fillRef>
+          <a:effectRef idx="2">
+            <a:schemeClr val="accent1"/>
+          </a:effectRef>
+          <a:fontRef idx="minor">
+            <a:schemeClr val="lt1"/>
+          </a:fontRef>
+        </p:style>
+        <p:txBody>
+          <a:bodyPr rtlCol="0" anchor="ctr"/>
+          <a:lstStyle/>
+          <a:p>
+            <a:pPr algn="ctr"/>
+          </a:p>
+        </p:txBody>
+      </p:sp>
       <p:pic>
         <p:nvPicPr>
-          <p:cNvPr id="19" name="Picture 18" descr="check_steel.png"/>
+          <p:cNvPr id="24" name="Picture 23" descr="check_white.png"/>
           <p:cNvPicPr>
             <a:picLocks noChangeAspect="1"/>
           </p:cNvPicPr>
@@ -8065,8 +8274,8 @@
         </p:blipFill>
         <p:spPr>
           <a:xfrm>
-            <a:off x="987552" y="4956048"/>
-            <a:ext cx="237744" cy="237744"/>
+            <a:off x="1110447" y="4521159"/>
+            <a:ext cx="266273" cy="266273"/>
           </a:xfrm>
           <a:prstGeom prst="rect">
             <a:avLst/>
@@ -8075,14 +8284,14 @@
       </p:pic>
       <p:sp>
         <p:nvSpPr>
-          <p:cNvPr id="20" name="TextBox 19"/>
+          <p:cNvPr id="25" name="TextBox 24"/>
           <p:cNvSpPr txBox="1"/>
           <p:nvPr/>
         </p:nvSpPr>
         <p:spPr>
           <a:xfrm>
-            <a:off x="1353312" y="4809744"/>
-            <a:ext cx="5029200" cy="530352"/>
+            <a:off x="1627632" y="4261104"/>
+            <a:ext cx="4206240" cy="786384"/>
           </a:xfrm>
           <a:prstGeom prst="rect">
             <a:avLst/>
@@ -8107,221 +8316,13 @@
               </a:spcAft>
             </a:pPr>
             <a:r>
-              <a:rPr sz="1200" b="0">
+              <a:rPr sz="1150" b="0">
                 <a:solidFill>
                   <a:srgbClr val="1A1A1A"/>
                 </a:solidFill>
                 <a:latin typeface="Red Hat Text"/>
               </a:rPr>
               <a:t>The modern Quarkus counterpart scores 1 — that's the destination</a:t>
-            </a:r>
-          </a:p>
-        </p:txBody>
-      </p:sp>
-      <p:sp>
-        <p:nvSpPr>
-          <p:cNvPr id="21" name="Rounded Rectangle 20"/>
-          <p:cNvSpPr/>
-          <p:nvPr/>
-        </p:nvSpPr>
-        <p:spPr>
-          <a:xfrm>
-            <a:off x="6812280" y="2395728"/>
-            <a:ext cx="4538167" cy="2944368"/>
-          </a:xfrm>
-          <a:prstGeom prst="roundRect">
-            <a:avLst>
-              <a:gd name="adj" fmla="val 4000"/>
-            </a:avLst>
-          </a:prstGeom>
-          <a:solidFill>
-            <a:srgbClr val="FFFFFF"/>
-          </a:solidFill>
-          <a:ln w="15240">
-            <a:solidFill>
-              <a:srgbClr val="DDE1E6"/>
-            </a:solidFill>
-          </a:ln>
-          <a:effectLst/>
-        </p:spPr>
-        <p:style>
-          <a:lnRef idx="1">
-            <a:schemeClr val="accent1"/>
-          </a:lnRef>
-          <a:fillRef idx="3">
-            <a:schemeClr val="accent1"/>
-          </a:fillRef>
-          <a:effectRef idx="2">
-            <a:schemeClr val="accent1"/>
-          </a:effectRef>
-          <a:fontRef idx="minor">
-            <a:schemeClr val="lt1"/>
-          </a:fontRef>
-        </p:style>
-        <p:txBody>
-          <a:bodyPr rtlCol="0" anchor="ctr"/>
-          <a:lstStyle/>
-          <a:p>
-            <a:pPr algn="ctr"/>
-          </a:p>
-        </p:txBody>
-      </p:sp>
-      <p:sp>
-        <p:nvSpPr>
-          <p:cNvPr id="22" name="Rounded Rectangle 21"/>
-          <p:cNvSpPr/>
-          <p:nvPr/>
-        </p:nvSpPr>
-        <p:spPr>
-          <a:xfrm>
-            <a:off x="7013448" y="2596896"/>
-            <a:ext cx="1298448" cy="310896"/>
-          </a:xfrm>
-          <a:prstGeom prst="roundRect">
-            <a:avLst>
-              <a:gd name="adj" fmla="val 50000"/>
-            </a:avLst>
-          </a:prstGeom>
-          <a:solidFill>
-            <a:srgbClr val="FCECEC"/>
-          </a:solidFill>
-          <a:ln>
-            <a:noFill/>
-          </a:ln>
-          <a:effectLst/>
-        </p:spPr>
-        <p:style>
-          <a:lnRef idx="1">
-            <a:schemeClr val="accent1"/>
-          </a:lnRef>
-          <a:fillRef idx="3">
-            <a:schemeClr val="accent1"/>
-          </a:fillRef>
-          <a:effectRef idx="2">
-            <a:schemeClr val="accent1"/>
-          </a:effectRef>
-          <a:fontRef idx="minor">
-            <a:schemeClr val="lt1"/>
-          </a:fontRef>
-        </p:style>
-        <p:txBody>
-          <a:bodyPr rtlCol="0" anchor="ctr"/>
-          <a:lstStyle/>
-          <a:p>
-            <a:pPr algn="ctr"/>
-          </a:p>
-        </p:txBody>
-      </p:sp>
-      <p:sp>
-        <p:nvSpPr>
-          <p:cNvPr id="23" name="TextBox 22"/>
-          <p:cNvSpPr txBox="1"/>
-          <p:nvPr/>
-        </p:nvSpPr>
-        <p:spPr>
-          <a:xfrm>
-            <a:off x="7013448" y="2596896"/>
-            <a:ext cx="1298448" cy="310896"/>
-          </a:xfrm>
-          <a:prstGeom prst="rect">
-            <a:avLst/>
-          </a:prstGeom>
-          <a:noFill/>
-        </p:spPr>
-        <p:txBody>
-          <a:bodyPr wrap="none" anchor="ctr" lIns="0" rIns="0" tIns="0" bIns="0">
-            <a:spAutoFit/>
-          </a:bodyPr>
-          <a:lstStyle/>
-          <a:p>
-            <a:pPr algn="ctr">
-              <a:lnSpc>
-                <a:spcPct val="106000"/>
-              </a:lnSpc>
-              <a:spcBef>
-                <a:spcPts val="0"/>
-              </a:spcBef>
-              <a:spcAft>
-                <a:spcPts val="0"/>
-              </a:spcAft>
-            </a:pPr>
-            <a:r>
-              <a:rPr sz="850" b="1">
-                <a:solidFill>
-                  <a:srgbClr val="B80000"/>
-                </a:solidFill>
-                <a:latin typeface="Red Hat Display"/>
-              </a:rPr>
-              <a:t>MEDIA PASS</a:t>
-            </a:r>
-          </a:p>
-        </p:txBody>
-      </p:sp>
-      <p:pic>
-        <p:nvPicPr>
-          <p:cNvPr id="24" name="Picture 23" descr="eye_slate.png"/>
-          <p:cNvPicPr>
-            <a:picLocks noChangeAspect="1"/>
-          </p:cNvPicPr>
-          <p:nvPr/>
-        </p:nvPicPr>
-        <p:blipFill>
-          <a:blip r:embed="rId4"/>
-          <a:stretch>
-            <a:fillRect/>
-          </a:stretch>
-        </p:blipFill>
-        <p:spPr>
-          <a:xfrm>
-            <a:off x="8843619" y="3108960"/>
-            <a:ext cx="475488" cy="475488"/>
-          </a:xfrm>
-          <a:prstGeom prst="rect">
-            <a:avLst/>
-          </a:prstGeom>
-        </p:spPr>
-      </p:pic>
-      <p:sp>
-        <p:nvSpPr>
-          <p:cNvPr id="25" name="TextBox 24"/>
-          <p:cNvSpPr txBox="1"/>
-          <p:nvPr/>
-        </p:nvSpPr>
-        <p:spPr>
-          <a:xfrm>
-            <a:off x="7050024" y="3721608"/>
-            <a:ext cx="4062679" cy="1481328"/>
-          </a:xfrm>
-          <a:prstGeom prst="rect">
-            <a:avLst/>
-          </a:prstGeom>
-          <a:noFill/>
-        </p:spPr>
-        <p:txBody>
-          <a:bodyPr wrap="square" anchor="t" lIns="0" rIns="0" tIns="0" bIns="0">
-            <a:spAutoFit/>
-          </a:bodyPr>
-          <a:lstStyle/>
-          <a:p>
-            <a:pPr algn="l">
-              <a:lnSpc>
-                <a:spcPct val="120000"/>
-              </a:lnSpc>
-              <a:spcBef>
-                <a:spcPts val="0"/>
-              </a:spcBef>
-              <a:spcAft>
-                <a:spcPts val="0"/>
-              </a:spcAft>
-            </a:pPr>
-            <a:r>
-              <a:rPr sz="950" b="0">
-                <a:solidFill>
-                  <a:srgbClr val="8A9099"/>
-                </a:solidFill>
-                <a:latin typeface="Red Hat Text"/>
-              </a:rPr>
-              <a:t>A stylized report table — the seven issues with category chips (red=mandatory, amber=potential) and effort badges, three of them lassoed and labeled "one migration: javax→jakarta," two lassoed "externalize config." A side gauge shows "24 → (fix) → … → 1 (modern)."</a:t>
             </a:r>
           </a:p>
         </p:txBody>
@@ -8629,11 +8630,11 @@
         <p:spPr>
           <a:xfrm>
             <a:off x="841248" y="2395728"/>
-            <a:ext cx="5715000" cy="530352"/>
+            <a:ext cx="5138928" cy="786384"/>
           </a:xfrm>
           <a:prstGeom prst="roundRect">
             <a:avLst>
-              <a:gd name="adj" fmla="val 6000"/>
+              <a:gd name="adj" fmla="val 7000"/>
             </a:avLst>
           </a:prstGeom>
           <a:solidFill>
@@ -8668,9 +8669,55 @@
           </a:p>
         </p:txBody>
       </p:sp>
+      <p:sp>
+        <p:nvSpPr>
+          <p:cNvPr id="7" name="Rounded Rectangle 6"/>
+          <p:cNvSpPr/>
+          <p:nvPr/>
+        </p:nvSpPr>
+        <p:spPr>
+          <a:xfrm>
+            <a:off x="987552" y="2532888"/>
+            <a:ext cx="512064" cy="512064"/>
+          </a:xfrm>
+          <a:prstGeom prst="roundRect">
+            <a:avLst>
+              <a:gd name="adj" fmla="val 26000"/>
+            </a:avLst>
+          </a:prstGeom>
+          <a:solidFill>
+            <a:srgbClr val="EE0000"/>
+          </a:solidFill>
+          <a:ln>
+            <a:noFill/>
+          </a:ln>
+          <a:effectLst/>
+        </p:spPr>
+        <p:style>
+          <a:lnRef idx="1">
+            <a:schemeClr val="accent1"/>
+          </a:lnRef>
+          <a:fillRef idx="3">
+            <a:schemeClr val="accent1"/>
+          </a:fillRef>
+          <a:effectRef idx="2">
+            <a:schemeClr val="accent1"/>
+          </a:effectRef>
+          <a:fontRef idx="minor">
+            <a:schemeClr val="lt1"/>
+          </a:fontRef>
+        </p:style>
+        <p:txBody>
+          <a:bodyPr rtlCol="0" anchor="ctr"/>
+          <a:lstStyle/>
+          <a:p>
+            <a:pPr algn="ctr"/>
+          </a:p>
+        </p:txBody>
+      </p:sp>
       <p:pic>
         <p:nvPicPr>
-          <p:cNvPr id="7" name="Picture 6" descr="check_steel.png"/>
+          <p:cNvPr id="8" name="Picture 7" descr="check_white.png"/>
           <p:cNvPicPr>
             <a:picLocks noChangeAspect="1"/>
           </p:cNvPicPr>
@@ -8684,8 +8731,8 @@
         </p:blipFill>
         <p:spPr>
           <a:xfrm>
-            <a:off x="987552" y="2542032"/>
-            <a:ext cx="237744" cy="237744"/>
+            <a:off x="1110447" y="2655783"/>
+            <a:ext cx="266273" cy="266273"/>
           </a:xfrm>
           <a:prstGeom prst="rect">
             <a:avLst/>
@@ -8694,14 +8741,14 @@
       </p:pic>
       <p:sp>
         <p:nvSpPr>
-          <p:cNvPr id="8" name="TextBox 7"/>
+          <p:cNvPr id="9" name="TextBox 8"/>
           <p:cNvSpPr txBox="1"/>
           <p:nvPr/>
         </p:nvSpPr>
         <p:spPr>
           <a:xfrm>
-            <a:off x="1353312" y="2395728"/>
-            <a:ext cx="5029200" cy="530352"/>
+            <a:off x="1627632" y="2395728"/>
+            <a:ext cx="4206240" cy="786384"/>
           </a:xfrm>
           <a:prstGeom prst="rect">
             <a:avLst/>
@@ -8726,7 +8773,7 @@
               </a:spcAft>
             </a:pPr>
             <a:r>
-              <a:rPr sz="1200" b="0">
+              <a:rPr sz="1150" b="0">
                 <a:solidFill>
                   <a:srgbClr val="1A1A1A"/>
                 </a:solidFill>
@@ -8739,18 +8786,18 @@
       </p:sp>
       <p:sp>
         <p:nvSpPr>
-          <p:cNvPr id="9" name="Rounded Rectangle 8"/>
+          <p:cNvPr id="10" name="Rounded Rectangle 9"/>
           <p:cNvSpPr/>
           <p:nvPr/>
         </p:nvSpPr>
         <p:spPr>
           <a:xfrm>
-            <a:off x="841248" y="2999232"/>
-            <a:ext cx="5715000" cy="530352"/>
+            <a:off x="6254496" y="2395728"/>
+            <a:ext cx="5138928" cy="786384"/>
           </a:xfrm>
           <a:prstGeom prst="roundRect">
             <a:avLst>
-              <a:gd name="adj" fmla="val 6000"/>
+              <a:gd name="adj" fmla="val 7000"/>
             </a:avLst>
           </a:prstGeom>
           <a:solidFill>
@@ -8785,9 +8832,55 @@
           </a:p>
         </p:txBody>
       </p:sp>
+      <p:sp>
+        <p:nvSpPr>
+          <p:cNvPr id="11" name="Rounded Rectangle 10"/>
+          <p:cNvSpPr/>
+          <p:nvPr/>
+        </p:nvSpPr>
+        <p:spPr>
+          <a:xfrm>
+            <a:off x="6400800" y="2532888"/>
+            <a:ext cx="512064" cy="512064"/>
+          </a:xfrm>
+          <a:prstGeom prst="roundRect">
+            <a:avLst>
+              <a:gd name="adj" fmla="val 26000"/>
+            </a:avLst>
+          </a:prstGeom>
+          <a:solidFill>
+            <a:srgbClr val="EE0000"/>
+          </a:solidFill>
+          <a:ln>
+            <a:noFill/>
+          </a:ln>
+          <a:effectLst/>
+        </p:spPr>
+        <p:style>
+          <a:lnRef idx="1">
+            <a:schemeClr val="accent1"/>
+          </a:lnRef>
+          <a:fillRef idx="3">
+            <a:schemeClr val="accent1"/>
+          </a:fillRef>
+          <a:effectRef idx="2">
+            <a:schemeClr val="accent1"/>
+          </a:effectRef>
+          <a:fontRef idx="minor">
+            <a:schemeClr val="lt1"/>
+          </a:fontRef>
+        </p:style>
+        <p:txBody>
+          <a:bodyPr rtlCol="0" anchor="ctr"/>
+          <a:lstStyle/>
+          <a:p>
+            <a:pPr algn="ctr"/>
+          </a:p>
+        </p:txBody>
+      </p:sp>
       <p:pic>
         <p:nvPicPr>
-          <p:cNvPr id="10" name="Picture 9" descr="check_steel.png"/>
+          <p:cNvPr id="12" name="Picture 11" descr="check_white.png"/>
           <p:cNvPicPr>
             <a:picLocks noChangeAspect="1"/>
           </p:cNvPicPr>
@@ -8801,8 +8894,8 @@
         </p:blipFill>
         <p:spPr>
           <a:xfrm>
-            <a:off x="987552" y="3145536"/>
-            <a:ext cx="237744" cy="237744"/>
+            <a:off x="6523695" y="2655783"/>
+            <a:ext cx="266273" cy="266273"/>
           </a:xfrm>
           <a:prstGeom prst="rect">
             <a:avLst/>
@@ -8811,14 +8904,14 @@
       </p:pic>
       <p:sp>
         <p:nvSpPr>
-          <p:cNvPr id="11" name="TextBox 10"/>
+          <p:cNvPr id="13" name="TextBox 12"/>
           <p:cNvSpPr txBox="1"/>
           <p:nvPr/>
         </p:nvSpPr>
         <p:spPr>
           <a:xfrm>
-            <a:off x="1353312" y="2999232"/>
-            <a:ext cx="5029200" cy="530352"/>
+            <a:off x="7040880" y="2395728"/>
+            <a:ext cx="4206240" cy="786384"/>
           </a:xfrm>
           <a:prstGeom prst="rect">
             <a:avLst/>
@@ -8843,7 +8936,7 @@
               </a:spcAft>
             </a:pPr>
             <a:r>
-              <a:rPr sz="1200" b="0">
+              <a:rPr sz="1150" b="0">
                 <a:solidFill>
                   <a:srgbClr val="1A1A1A"/>
                 </a:solidFill>
@@ -8856,18 +8949,18 @@
       </p:sp>
       <p:sp>
         <p:nvSpPr>
-          <p:cNvPr id="12" name="Rounded Rectangle 11"/>
+          <p:cNvPr id="14" name="Rounded Rectangle 13"/>
           <p:cNvSpPr/>
           <p:nvPr/>
         </p:nvSpPr>
         <p:spPr>
           <a:xfrm>
-            <a:off x="841248" y="3602736"/>
-            <a:ext cx="5715000" cy="530352"/>
+            <a:off x="841248" y="3328416"/>
+            <a:ext cx="5138928" cy="786384"/>
           </a:xfrm>
           <a:prstGeom prst="roundRect">
             <a:avLst>
-              <a:gd name="adj" fmla="val 6000"/>
+              <a:gd name="adj" fmla="val 7000"/>
             </a:avLst>
           </a:prstGeom>
           <a:solidFill>
@@ -8902,9 +8995,55 @@
           </a:p>
         </p:txBody>
       </p:sp>
+      <p:sp>
+        <p:nvSpPr>
+          <p:cNvPr id="15" name="Rounded Rectangle 14"/>
+          <p:cNvSpPr/>
+          <p:nvPr/>
+        </p:nvSpPr>
+        <p:spPr>
+          <a:xfrm>
+            <a:off x="987552" y="3465576"/>
+            <a:ext cx="512064" cy="512064"/>
+          </a:xfrm>
+          <a:prstGeom prst="roundRect">
+            <a:avLst>
+              <a:gd name="adj" fmla="val 26000"/>
+            </a:avLst>
+          </a:prstGeom>
+          <a:solidFill>
+            <a:srgbClr val="EE0000"/>
+          </a:solidFill>
+          <a:ln>
+            <a:noFill/>
+          </a:ln>
+          <a:effectLst/>
+        </p:spPr>
+        <p:style>
+          <a:lnRef idx="1">
+            <a:schemeClr val="accent1"/>
+          </a:lnRef>
+          <a:fillRef idx="3">
+            <a:schemeClr val="accent1"/>
+          </a:fillRef>
+          <a:effectRef idx="2">
+            <a:schemeClr val="accent1"/>
+          </a:effectRef>
+          <a:fontRef idx="minor">
+            <a:schemeClr val="lt1"/>
+          </a:fontRef>
+        </p:style>
+        <p:txBody>
+          <a:bodyPr rtlCol="0" anchor="ctr"/>
+          <a:lstStyle/>
+          <a:p>
+            <a:pPr algn="ctr"/>
+          </a:p>
+        </p:txBody>
+      </p:sp>
       <p:pic>
         <p:nvPicPr>
-          <p:cNvPr id="13" name="Picture 12" descr="check_steel.png"/>
+          <p:cNvPr id="16" name="Picture 15" descr="check_white.png"/>
           <p:cNvPicPr>
             <a:picLocks noChangeAspect="1"/>
           </p:cNvPicPr>
@@ -8918,8 +9057,8 @@
         </p:blipFill>
         <p:spPr>
           <a:xfrm>
-            <a:off x="987552" y="3749040"/>
-            <a:ext cx="237744" cy="237744"/>
+            <a:off x="1110447" y="3588471"/>
+            <a:ext cx="266273" cy="266273"/>
           </a:xfrm>
           <a:prstGeom prst="rect">
             <a:avLst/>
@@ -8928,14 +9067,14 @@
       </p:pic>
       <p:sp>
         <p:nvSpPr>
-          <p:cNvPr id="14" name="TextBox 13"/>
+          <p:cNvPr id="17" name="TextBox 16"/>
           <p:cNvSpPr txBox="1"/>
           <p:nvPr/>
         </p:nvSpPr>
         <p:spPr>
           <a:xfrm>
-            <a:off x="1353312" y="3602736"/>
-            <a:ext cx="5029200" cy="530352"/>
+            <a:off x="1627632" y="3328416"/>
+            <a:ext cx="4206240" cy="786384"/>
           </a:xfrm>
           <a:prstGeom prst="rect">
             <a:avLst/>
@@ -8960,7 +9099,7 @@
               </a:spcAft>
             </a:pPr>
             <a:r>
-              <a:rPr sz="1200" b="0">
+              <a:rPr sz="1150" b="0">
                 <a:solidFill>
                   <a:srgbClr val="1A1A1A"/>
                 </a:solidFill>
@@ -8973,18 +9112,18 @@
       </p:sp>
       <p:sp>
         <p:nvSpPr>
-          <p:cNvPr id="15" name="Rounded Rectangle 14"/>
+          <p:cNvPr id="18" name="Rounded Rectangle 17"/>
           <p:cNvSpPr/>
           <p:nvPr/>
         </p:nvSpPr>
         <p:spPr>
           <a:xfrm>
-            <a:off x="841248" y="4206240"/>
-            <a:ext cx="5715000" cy="530352"/>
+            <a:off x="6254496" y="3328416"/>
+            <a:ext cx="5138928" cy="786384"/>
           </a:xfrm>
           <a:prstGeom prst="roundRect">
             <a:avLst>
-              <a:gd name="adj" fmla="val 6000"/>
+              <a:gd name="adj" fmla="val 7000"/>
             </a:avLst>
           </a:prstGeom>
           <a:solidFill>
@@ -9019,9 +9158,55 @@
           </a:p>
         </p:txBody>
       </p:sp>
+      <p:sp>
+        <p:nvSpPr>
+          <p:cNvPr id="19" name="Rounded Rectangle 18"/>
+          <p:cNvSpPr/>
+          <p:nvPr/>
+        </p:nvSpPr>
+        <p:spPr>
+          <a:xfrm>
+            <a:off x="6400800" y="3465576"/>
+            <a:ext cx="512064" cy="512064"/>
+          </a:xfrm>
+          <a:prstGeom prst="roundRect">
+            <a:avLst>
+              <a:gd name="adj" fmla="val 26000"/>
+            </a:avLst>
+          </a:prstGeom>
+          <a:solidFill>
+            <a:srgbClr val="EE0000"/>
+          </a:solidFill>
+          <a:ln>
+            <a:noFill/>
+          </a:ln>
+          <a:effectLst/>
+        </p:spPr>
+        <p:style>
+          <a:lnRef idx="1">
+            <a:schemeClr val="accent1"/>
+          </a:lnRef>
+          <a:fillRef idx="3">
+            <a:schemeClr val="accent1"/>
+          </a:fillRef>
+          <a:effectRef idx="2">
+            <a:schemeClr val="accent1"/>
+          </a:effectRef>
+          <a:fontRef idx="minor">
+            <a:schemeClr val="lt1"/>
+          </a:fontRef>
+        </p:style>
+        <p:txBody>
+          <a:bodyPr rtlCol="0" anchor="ctr"/>
+          <a:lstStyle/>
+          <a:p>
+            <a:pPr algn="ctr"/>
+          </a:p>
+        </p:txBody>
+      </p:sp>
       <p:pic>
         <p:nvPicPr>
-          <p:cNvPr id="16" name="Picture 15" descr="check_steel.png"/>
+          <p:cNvPr id="20" name="Picture 19" descr="check_white.png"/>
           <p:cNvPicPr>
             <a:picLocks noChangeAspect="1"/>
           </p:cNvPicPr>
@@ -9035,8 +9220,8 @@
         </p:blipFill>
         <p:spPr>
           <a:xfrm>
-            <a:off x="987552" y="4352544"/>
-            <a:ext cx="237744" cy="237744"/>
+            <a:off x="6523695" y="3588471"/>
+            <a:ext cx="266273" cy="266273"/>
           </a:xfrm>
           <a:prstGeom prst="rect">
             <a:avLst/>
@@ -9045,14 +9230,14 @@
       </p:pic>
       <p:sp>
         <p:nvSpPr>
-          <p:cNvPr id="17" name="TextBox 16"/>
+          <p:cNvPr id="21" name="TextBox 20"/>
           <p:cNvSpPr txBox="1"/>
           <p:nvPr/>
         </p:nvSpPr>
         <p:spPr>
           <a:xfrm>
-            <a:off x="1353312" y="4206240"/>
-            <a:ext cx="5029200" cy="530352"/>
+            <a:off x="7040880" y="3328416"/>
+            <a:ext cx="4206240" cy="786384"/>
           </a:xfrm>
           <a:prstGeom prst="rect">
             <a:avLst/>
@@ -9077,7 +9262,7 @@
               </a:spcAft>
             </a:pPr>
             <a:r>
-              <a:rPr sz="1200" b="0">
+              <a:rPr sz="1150" b="0">
                 <a:solidFill>
                   <a:srgbClr val="1A1A1A"/>
                 </a:solidFill>
@@ -9090,18 +9275,18 @@
       </p:sp>
       <p:sp>
         <p:nvSpPr>
-          <p:cNvPr id="18" name="Rounded Rectangle 17"/>
+          <p:cNvPr id="22" name="Rounded Rectangle 21"/>
           <p:cNvSpPr/>
           <p:nvPr/>
         </p:nvSpPr>
         <p:spPr>
           <a:xfrm>
-            <a:off x="841248" y="4809744"/>
-            <a:ext cx="5715000" cy="530352"/>
+            <a:off x="841248" y="4261104"/>
+            <a:ext cx="5138928" cy="786384"/>
           </a:xfrm>
           <a:prstGeom prst="roundRect">
             <a:avLst>
-              <a:gd name="adj" fmla="val 6000"/>
+              <a:gd name="adj" fmla="val 7000"/>
             </a:avLst>
           </a:prstGeom>
           <a:solidFill>
@@ -9136,9 +9321,55 @@
           </a:p>
         </p:txBody>
       </p:sp>
+      <p:sp>
+        <p:nvSpPr>
+          <p:cNvPr id="23" name="Rounded Rectangle 22"/>
+          <p:cNvSpPr/>
+          <p:nvPr/>
+        </p:nvSpPr>
+        <p:spPr>
+          <a:xfrm>
+            <a:off x="987552" y="4398264"/>
+            <a:ext cx="512064" cy="512064"/>
+          </a:xfrm>
+          <a:prstGeom prst="roundRect">
+            <a:avLst>
+              <a:gd name="adj" fmla="val 26000"/>
+            </a:avLst>
+          </a:prstGeom>
+          <a:solidFill>
+            <a:srgbClr val="EE0000"/>
+          </a:solidFill>
+          <a:ln>
+            <a:noFill/>
+          </a:ln>
+          <a:effectLst/>
+        </p:spPr>
+        <p:style>
+          <a:lnRef idx="1">
+            <a:schemeClr val="accent1"/>
+          </a:lnRef>
+          <a:fillRef idx="3">
+            <a:schemeClr val="accent1"/>
+          </a:fillRef>
+          <a:effectRef idx="2">
+            <a:schemeClr val="accent1"/>
+          </a:effectRef>
+          <a:fontRef idx="minor">
+            <a:schemeClr val="lt1"/>
+          </a:fontRef>
+        </p:style>
+        <p:txBody>
+          <a:bodyPr rtlCol="0" anchor="ctr"/>
+          <a:lstStyle/>
+          <a:p>
+            <a:pPr algn="ctr"/>
+          </a:p>
+        </p:txBody>
+      </p:sp>
       <p:pic>
         <p:nvPicPr>
-          <p:cNvPr id="19" name="Picture 18" descr="check_steel.png"/>
+          <p:cNvPr id="24" name="Picture 23" descr="check_white.png"/>
           <p:cNvPicPr>
             <a:picLocks noChangeAspect="1"/>
           </p:cNvPicPr>
@@ -9152,8 +9383,8 @@
         </p:blipFill>
         <p:spPr>
           <a:xfrm>
-            <a:off x="987552" y="4956048"/>
-            <a:ext cx="237744" cy="237744"/>
+            <a:off x="1110447" y="4521159"/>
+            <a:ext cx="266273" cy="266273"/>
           </a:xfrm>
           <a:prstGeom prst="rect">
             <a:avLst/>
@@ -9162,14 +9393,14 @@
       </p:pic>
       <p:sp>
         <p:nvSpPr>
-          <p:cNvPr id="20" name="TextBox 19"/>
+          <p:cNvPr id="25" name="TextBox 24"/>
           <p:cNvSpPr txBox="1"/>
           <p:nvPr/>
         </p:nvSpPr>
         <p:spPr>
           <a:xfrm>
-            <a:off x="1353312" y="4809744"/>
-            <a:ext cx="5029200" cy="530352"/>
+            <a:off x="1627632" y="4261104"/>
+            <a:ext cx="4206240" cy="786384"/>
           </a:xfrm>
           <a:prstGeom prst="rect">
             <a:avLst/>
@@ -9194,221 +9425,13 @@
               </a:spcAft>
             </a:pPr>
             <a:r>
-              <a:rPr sz="1200" b="0">
+              <a:rPr sz="1150" b="0">
                 <a:solidFill>
                   <a:srgbClr val="1A1A1A"/>
                 </a:solidFill>
                 <a:latin typeface="Red Hat Text"/>
               </a:rPr>
               <a:t>READ every diff like a junior wrote it under pressure — then re-analyze to PROVE it</a:t>
-            </a:r>
-          </a:p>
-        </p:txBody>
-      </p:sp>
-      <p:sp>
-        <p:nvSpPr>
-          <p:cNvPr id="21" name="Rounded Rectangle 20"/>
-          <p:cNvSpPr/>
-          <p:nvPr/>
-        </p:nvSpPr>
-        <p:spPr>
-          <a:xfrm>
-            <a:off x="6812280" y="2395728"/>
-            <a:ext cx="4538167" cy="2944368"/>
-          </a:xfrm>
-          <a:prstGeom prst="roundRect">
-            <a:avLst>
-              <a:gd name="adj" fmla="val 4000"/>
-            </a:avLst>
-          </a:prstGeom>
-          <a:solidFill>
-            <a:srgbClr val="FFFFFF"/>
-          </a:solidFill>
-          <a:ln w="15240">
-            <a:solidFill>
-              <a:srgbClr val="DDE1E6"/>
-            </a:solidFill>
-          </a:ln>
-          <a:effectLst/>
-        </p:spPr>
-        <p:style>
-          <a:lnRef idx="1">
-            <a:schemeClr val="accent1"/>
-          </a:lnRef>
-          <a:fillRef idx="3">
-            <a:schemeClr val="accent1"/>
-          </a:fillRef>
-          <a:effectRef idx="2">
-            <a:schemeClr val="accent1"/>
-          </a:effectRef>
-          <a:fontRef idx="minor">
-            <a:schemeClr val="lt1"/>
-          </a:fontRef>
-        </p:style>
-        <p:txBody>
-          <a:bodyPr rtlCol="0" anchor="ctr"/>
-          <a:lstStyle/>
-          <a:p>
-            <a:pPr algn="ctr"/>
-          </a:p>
-        </p:txBody>
-      </p:sp>
-      <p:sp>
-        <p:nvSpPr>
-          <p:cNvPr id="22" name="Rounded Rectangle 21"/>
-          <p:cNvSpPr/>
-          <p:nvPr/>
-        </p:nvSpPr>
-        <p:spPr>
-          <a:xfrm>
-            <a:off x="7013448" y="2596896"/>
-            <a:ext cx="1298448" cy="310896"/>
-          </a:xfrm>
-          <a:prstGeom prst="roundRect">
-            <a:avLst>
-              <a:gd name="adj" fmla="val 50000"/>
-            </a:avLst>
-          </a:prstGeom>
-          <a:solidFill>
-            <a:srgbClr val="FCECEC"/>
-          </a:solidFill>
-          <a:ln>
-            <a:noFill/>
-          </a:ln>
-          <a:effectLst/>
-        </p:spPr>
-        <p:style>
-          <a:lnRef idx="1">
-            <a:schemeClr val="accent1"/>
-          </a:lnRef>
-          <a:fillRef idx="3">
-            <a:schemeClr val="accent1"/>
-          </a:fillRef>
-          <a:effectRef idx="2">
-            <a:schemeClr val="accent1"/>
-          </a:effectRef>
-          <a:fontRef idx="minor">
-            <a:schemeClr val="lt1"/>
-          </a:fontRef>
-        </p:style>
-        <p:txBody>
-          <a:bodyPr rtlCol="0" anchor="ctr"/>
-          <a:lstStyle/>
-          <a:p>
-            <a:pPr algn="ctr"/>
-          </a:p>
-        </p:txBody>
-      </p:sp>
-      <p:sp>
-        <p:nvSpPr>
-          <p:cNvPr id="23" name="TextBox 22"/>
-          <p:cNvSpPr txBox="1"/>
-          <p:nvPr/>
-        </p:nvSpPr>
-        <p:spPr>
-          <a:xfrm>
-            <a:off x="7013448" y="2596896"/>
-            <a:ext cx="1298448" cy="310896"/>
-          </a:xfrm>
-          <a:prstGeom prst="rect">
-            <a:avLst/>
-          </a:prstGeom>
-          <a:noFill/>
-        </p:spPr>
-        <p:txBody>
-          <a:bodyPr wrap="none" anchor="ctr" lIns="0" rIns="0" tIns="0" bIns="0">
-            <a:spAutoFit/>
-          </a:bodyPr>
-          <a:lstStyle/>
-          <a:p>
-            <a:pPr algn="ctr">
-              <a:lnSpc>
-                <a:spcPct val="106000"/>
-              </a:lnSpc>
-              <a:spcBef>
-                <a:spcPts val="0"/>
-              </a:spcBef>
-              <a:spcAft>
-                <a:spcPts val="0"/>
-              </a:spcAft>
-            </a:pPr>
-            <a:r>
-              <a:rPr sz="850" b="1">
-                <a:solidFill>
-                  <a:srgbClr val="B80000"/>
-                </a:solidFill>
-                <a:latin typeface="Red Hat Display"/>
-              </a:rPr>
-              <a:t>MEDIA PASS</a:t>
-            </a:r>
-          </a:p>
-        </p:txBody>
-      </p:sp>
-      <p:pic>
-        <p:nvPicPr>
-          <p:cNvPr id="24" name="Picture 23" descr="eye_slate.png"/>
-          <p:cNvPicPr>
-            <a:picLocks noChangeAspect="1"/>
-          </p:cNvPicPr>
-          <p:nvPr/>
-        </p:nvPicPr>
-        <p:blipFill>
-          <a:blip r:embed="rId4"/>
-          <a:stretch>
-            <a:fillRect/>
-          </a:stretch>
-        </p:blipFill>
-        <p:spPr>
-          <a:xfrm>
-            <a:off x="8843619" y="3108960"/>
-            <a:ext cx="475488" cy="475488"/>
-          </a:xfrm>
-          <a:prstGeom prst="rect">
-            <a:avLst/>
-          </a:prstGeom>
-        </p:spPr>
-      </p:pic>
-      <p:sp>
-        <p:nvSpPr>
-          <p:cNvPr id="25" name="TextBox 24"/>
-          <p:cNvSpPr txBox="1"/>
-          <p:nvPr/>
-        </p:nvSpPr>
-        <p:spPr>
-          <a:xfrm>
-            <a:off x="7050024" y="3721608"/>
-            <a:ext cx="4062679" cy="1481328"/>
-          </a:xfrm>
-          <a:prstGeom prst="rect">
-            <a:avLst/>
-          </a:prstGeom>
-          <a:noFill/>
-        </p:spPr>
-        <p:txBody>
-          <a:bodyPr wrap="square" anchor="t" lIns="0" rIns="0" tIns="0" bIns="0">
-            <a:spAutoFit/>
-          </a:bodyPr>
-          <a:lstStyle/>
-          <a:p>
-            <a:pPr algn="l">
-              <a:lnSpc>
-                <a:spcPct val="120000"/>
-              </a:lnSpc>
-              <a:spcBef>
-                <a:spcPts val="0"/>
-              </a:spcBef>
-              <a:spcAft>
-                <a:spcPts val="0"/>
-              </a:spcAft>
-            </a:pPr>
-            <a:r>
-              <a:rPr sz="950" b="0">
-                <a:solidFill>
-                  <a:srgbClr val="8A9099"/>
-                </a:solidFill>
-                <a:latin typeface="Red Hat Text"/>
-              </a:rPr>
-              <a:t>A split card. Left: the MTA extension showing the "Hardcoded IP" issue and a proposed diff (red literal URL struck through, green System.getenv line added), an "Accept" button, and a magnifier over the diff labeled "read it first." Right: a caution strip "AI proposes · engineer disposes" and a small "[ADS] · degrades to manual" tag.</a:t>
             </a:r>
           </a:p>
         </p:txBody>
@@ -9716,11 +9739,11 @@
         <p:spPr>
           <a:xfrm>
             <a:off x="841248" y="2395728"/>
-            <a:ext cx="5715000" cy="530352"/>
+            <a:ext cx="5138928" cy="786384"/>
           </a:xfrm>
           <a:prstGeom prst="roundRect">
             <a:avLst>
-              <a:gd name="adj" fmla="val 6000"/>
+              <a:gd name="adj" fmla="val 7000"/>
             </a:avLst>
           </a:prstGeom>
           <a:solidFill>
@@ -9755,9 +9778,55 @@
           </a:p>
         </p:txBody>
       </p:sp>
+      <p:sp>
+        <p:nvSpPr>
+          <p:cNvPr id="7" name="Rounded Rectangle 6"/>
+          <p:cNvSpPr/>
+          <p:nvPr/>
+        </p:nvSpPr>
+        <p:spPr>
+          <a:xfrm>
+            <a:off x="987552" y="2532888"/>
+            <a:ext cx="512064" cy="512064"/>
+          </a:xfrm>
+          <a:prstGeom prst="roundRect">
+            <a:avLst>
+              <a:gd name="adj" fmla="val 26000"/>
+            </a:avLst>
+          </a:prstGeom>
+          <a:solidFill>
+            <a:srgbClr val="EE0000"/>
+          </a:solidFill>
+          <a:ln>
+            <a:noFill/>
+          </a:ln>
+          <a:effectLst/>
+        </p:spPr>
+        <p:style>
+          <a:lnRef idx="1">
+            <a:schemeClr val="accent1"/>
+          </a:lnRef>
+          <a:fillRef idx="3">
+            <a:schemeClr val="accent1"/>
+          </a:fillRef>
+          <a:effectRef idx="2">
+            <a:schemeClr val="accent1"/>
+          </a:effectRef>
+          <a:fontRef idx="minor">
+            <a:schemeClr val="lt1"/>
+          </a:fontRef>
+        </p:style>
+        <p:txBody>
+          <a:bodyPr rtlCol="0" anchor="ctr"/>
+          <a:lstStyle/>
+          <a:p>
+            <a:pPr algn="ctr"/>
+          </a:p>
+        </p:txBody>
+      </p:sp>
       <p:pic>
         <p:nvPicPr>
-          <p:cNvPr id="7" name="Picture 6" descr="check_steel.png"/>
+          <p:cNvPr id="8" name="Picture 7" descr="check_white.png"/>
           <p:cNvPicPr>
             <a:picLocks noChangeAspect="1"/>
           </p:cNvPicPr>
@@ -9771,8 +9840,8 @@
         </p:blipFill>
         <p:spPr>
           <a:xfrm>
-            <a:off x="987552" y="2542032"/>
-            <a:ext cx="237744" cy="237744"/>
+            <a:off x="1110447" y="2655783"/>
+            <a:ext cx="266273" cy="266273"/>
           </a:xfrm>
           <a:prstGeom prst="rect">
             <a:avLst/>
@@ -9781,14 +9850,14 @@
       </p:pic>
       <p:sp>
         <p:nvSpPr>
-          <p:cNvPr id="8" name="TextBox 7"/>
+          <p:cNvPr id="9" name="TextBox 8"/>
           <p:cNvSpPr txBox="1"/>
           <p:nvPr/>
         </p:nvSpPr>
         <p:spPr>
           <a:xfrm>
-            <a:off x="1353312" y="2395728"/>
-            <a:ext cx="5029200" cy="530352"/>
+            <a:off x="1627632" y="2395728"/>
+            <a:ext cx="4206240" cy="786384"/>
           </a:xfrm>
           <a:prstGeom prst="rect">
             <a:avLst/>
@@ -9813,7 +9882,7 @@
               </a:spcAft>
             </a:pPr>
             <a:r>
-              <a:rPr sz="1200" b="0">
+              <a:rPr sz="1150" b="0">
                 <a:solidFill>
                   <a:srgbClr val="1A1A1A"/>
                 </a:solidFill>
@@ -9826,18 +9895,18 @@
       </p:sp>
       <p:sp>
         <p:nvSpPr>
-          <p:cNvPr id="9" name="Rounded Rectangle 8"/>
+          <p:cNvPr id="10" name="Rounded Rectangle 9"/>
           <p:cNvSpPr/>
           <p:nvPr/>
         </p:nvSpPr>
         <p:spPr>
           <a:xfrm>
-            <a:off x="841248" y="2999232"/>
-            <a:ext cx="5715000" cy="530352"/>
+            <a:off x="6254496" y="2395728"/>
+            <a:ext cx="5138928" cy="786384"/>
           </a:xfrm>
           <a:prstGeom prst="roundRect">
             <a:avLst>
-              <a:gd name="adj" fmla="val 6000"/>
+              <a:gd name="adj" fmla="val 7000"/>
             </a:avLst>
           </a:prstGeom>
           <a:solidFill>
@@ -9872,9 +9941,55 @@
           </a:p>
         </p:txBody>
       </p:sp>
+      <p:sp>
+        <p:nvSpPr>
+          <p:cNvPr id="11" name="Rounded Rectangle 10"/>
+          <p:cNvSpPr/>
+          <p:nvPr/>
+        </p:nvSpPr>
+        <p:spPr>
+          <a:xfrm>
+            <a:off x="6400800" y="2532888"/>
+            <a:ext cx="512064" cy="512064"/>
+          </a:xfrm>
+          <a:prstGeom prst="roundRect">
+            <a:avLst>
+              <a:gd name="adj" fmla="val 26000"/>
+            </a:avLst>
+          </a:prstGeom>
+          <a:solidFill>
+            <a:srgbClr val="EE0000"/>
+          </a:solidFill>
+          <a:ln>
+            <a:noFill/>
+          </a:ln>
+          <a:effectLst/>
+        </p:spPr>
+        <p:style>
+          <a:lnRef idx="1">
+            <a:schemeClr val="accent1"/>
+          </a:lnRef>
+          <a:fillRef idx="3">
+            <a:schemeClr val="accent1"/>
+          </a:fillRef>
+          <a:effectRef idx="2">
+            <a:schemeClr val="accent1"/>
+          </a:effectRef>
+          <a:fontRef idx="minor">
+            <a:schemeClr val="lt1"/>
+          </a:fontRef>
+        </p:style>
+        <p:txBody>
+          <a:bodyPr rtlCol="0" anchor="ctr"/>
+          <a:lstStyle/>
+          <a:p>
+            <a:pPr algn="ctr"/>
+          </a:p>
+        </p:txBody>
+      </p:sp>
       <p:pic>
         <p:nvPicPr>
-          <p:cNvPr id="10" name="Picture 9" descr="check_steel.png"/>
+          <p:cNvPr id="12" name="Picture 11" descr="check_white.png"/>
           <p:cNvPicPr>
             <a:picLocks noChangeAspect="1"/>
           </p:cNvPicPr>
@@ -9888,8 +10003,8 @@
         </p:blipFill>
         <p:spPr>
           <a:xfrm>
-            <a:off x="987552" y="3145536"/>
-            <a:ext cx="237744" cy="237744"/>
+            <a:off x="6523695" y="2655783"/>
+            <a:ext cx="266273" cy="266273"/>
           </a:xfrm>
           <a:prstGeom prst="rect">
             <a:avLst/>
@@ -9898,14 +10013,14 @@
       </p:pic>
       <p:sp>
         <p:nvSpPr>
-          <p:cNvPr id="11" name="TextBox 10"/>
+          <p:cNvPr id="13" name="TextBox 12"/>
           <p:cNvSpPr txBox="1"/>
           <p:nvPr/>
         </p:nvSpPr>
         <p:spPr>
           <a:xfrm>
-            <a:off x="1353312" y="2999232"/>
-            <a:ext cx="5029200" cy="530352"/>
+            <a:off x="7040880" y="2395728"/>
+            <a:ext cx="4206240" cy="786384"/>
           </a:xfrm>
           <a:prstGeom prst="rect">
             <a:avLst/>
@@ -9930,7 +10045,7 @@
               </a:spcAft>
             </a:pPr>
             <a:r>
-              <a:rPr sz="1200" b="0">
+              <a:rPr sz="1150" b="0">
                 <a:solidFill>
                   <a:srgbClr val="1A1A1A"/>
                 </a:solidFill>
@@ -9943,18 +10058,18 @@
       </p:sp>
       <p:sp>
         <p:nvSpPr>
-          <p:cNvPr id="12" name="Rounded Rectangle 11"/>
+          <p:cNvPr id="14" name="Rounded Rectangle 13"/>
           <p:cNvSpPr/>
           <p:nvPr/>
         </p:nvSpPr>
         <p:spPr>
           <a:xfrm>
-            <a:off x="841248" y="3602736"/>
-            <a:ext cx="5715000" cy="530352"/>
+            <a:off x="841248" y="3328416"/>
+            <a:ext cx="5138928" cy="786384"/>
           </a:xfrm>
           <a:prstGeom prst="roundRect">
             <a:avLst>
-              <a:gd name="adj" fmla="val 6000"/>
+              <a:gd name="adj" fmla="val 7000"/>
             </a:avLst>
           </a:prstGeom>
           <a:solidFill>
@@ -9989,9 +10104,55 @@
           </a:p>
         </p:txBody>
       </p:sp>
+      <p:sp>
+        <p:nvSpPr>
+          <p:cNvPr id="15" name="Rounded Rectangle 14"/>
+          <p:cNvSpPr/>
+          <p:nvPr/>
+        </p:nvSpPr>
+        <p:spPr>
+          <a:xfrm>
+            <a:off x="987552" y="3465576"/>
+            <a:ext cx="512064" cy="512064"/>
+          </a:xfrm>
+          <a:prstGeom prst="roundRect">
+            <a:avLst>
+              <a:gd name="adj" fmla="val 26000"/>
+            </a:avLst>
+          </a:prstGeom>
+          <a:solidFill>
+            <a:srgbClr val="EE0000"/>
+          </a:solidFill>
+          <a:ln>
+            <a:noFill/>
+          </a:ln>
+          <a:effectLst/>
+        </p:spPr>
+        <p:style>
+          <a:lnRef idx="1">
+            <a:schemeClr val="accent1"/>
+          </a:lnRef>
+          <a:fillRef idx="3">
+            <a:schemeClr val="accent1"/>
+          </a:fillRef>
+          <a:effectRef idx="2">
+            <a:schemeClr val="accent1"/>
+          </a:effectRef>
+          <a:fontRef idx="minor">
+            <a:schemeClr val="lt1"/>
+          </a:fontRef>
+        </p:style>
+        <p:txBody>
+          <a:bodyPr rtlCol="0" anchor="ctr"/>
+          <a:lstStyle/>
+          <a:p>
+            <a:pPr algn="ctr"/>
+          </a:p>
+        </p:txBody>
+      </p:sp>
       <p:pic>
         <p:nvPicPr>
-          <p:cNvPr id="13" name="Picture 12" descr="check_steel.png"/>
+          <p:cNvPr id="16" name="Picture 15" descr="check_white.png"/>
           <p:cNvPicPr>
             <a:picLocks noChangeAspect="1"/>
           </p:cNvPicPr>
@@ -10005,8 +10166,8 @@
         </p:blipFill>
         <p:spPr>
           <a:xfrm>
-            <a:off x="987552" y="3749040"/>
-            <a:ext cx="237744" cy="237744"/>
+            <a:off x="1110447" y="3588471"/>
+            <a:ext cx="266273" cy="266273"/>
           </a:xfrm>
           <a:prstGeom prst="rect">
             <a:avLst/>
@@ -10015,14 +10176,14 @@
       </p:pic>
       <p:sp>
         <p:nvSpPr>
-          <p:cNvPr id="14" name="TextBox 13"/>
+          <p:cNvPr id="17" name="TextBox 16"/>
           <p:cNvSpPr txBox="1"/>
           <p:nvPr/>
         </p:nvSpPr>
         <p:spPr>
           <a:xfrm>
-            <a:off x="1353312" y="3602736"/>
-            <a:ext cx="5029200" cy="530352"/>
+            <a:off x="1627632" y="3328416"/>
+            <a:ext cx="4206240" cy="786384"/>
           </a:xfrm>
           <a:prstGeom prst="rect">
             <a:avLst/>
@@ -10047,7 +10208,7 @@
               </a:spcAft>
             </a:pPr>
             <a:r>
-              <a:rPr sz="1200" b="0">
+              <a:rPr sz="1150" b="0">
                 <a:solidFill>
                   <a:srgbClr val="1A1A1A"/>
                 </a:solidFill>
@@ -10060,18 +10221,18 @@
       </p:sp>
       <p:sp>
         <p:nvSpPr>
-          <p:cNvPr id="15" name="Rounded Rectangle 14"/>
+          <p:cNvPr id="18" name="Rounded Rectangle 17"/>
           <p:cNvSpPr/>
           <p:nvPr/>
         </p:nvSpPr>
         <p:spPr>
           <a:xfrm>
-            <a:off x="841248" y="4206240"/>
-            <a:ext cx="5715000" cy="530352"/>
+            <a:off x="6254496" y="3328416"/>
+            <a:ext cx="5138928" cy="786384"/>
           </a:xfrm>
           <a:prstGeom prst="roundRect">
             <a:avLst>
-              <a:gd name="adj" fmla="val 6000"/>
+              <a:gd name="adj" fmla="val 7000"/>
             </a:avLst>
           </a:prstGeom>
           <a:solidFill>
@@ -10106,9 +10267,55 @@
           </a:p>
         </p:txBody>
       </p:sp>
+      <p:sp>
+        <p:nvSpPr>
+          <p:cNvPr id="19" name="Rounded Rectangle 18"/>
+          <p:cNvSpPr/>
+          <p:nvPr/>
+        </p:nvSpPr>
+        <p:spPr>
+          <a:xfrm>
+            <a:off x="6400800" y="3465576"/>
+            <a:ext cx="512064" cy="512064"/>
+          </a:xfrm>
+          <a:prstGeom prst="roundRect">
+            <a:avLst>
+              <a:gd name="adj" fmla="val 26000"/>
+            </a:avLst>
+          </a:prstGeom>
+          <a:solidFill>
+            <a:srgbClr val="EE0000"/>
+          </a:solidFill>
+          <a:ln>
+            <a:noFill/>
+          </a:ln>
+          <a:effectLst/>
+        </p:spPr>
+        <p:style>
+          <a:lnRef idx="1">
+            <a:schemeClr val="accent1"/>
+          </a:lnRef>
+          <a:fillRef idx="3">
+            <a:schemeClr val="accent1"/>
+          </a:fillRef>
+          <a:effectRef idx="2">
+            <a:schemeClr val="accent1"/>
+          </a:effectRef>
+          <a:fontRef idx="minor">
+            <a:schemeClr val="lt1"/>
+          </a:fontRef>
+        </p:style>
+        <p:txBody>
+          <a:bodyPr rtlCol="0" anchor="ctr"/>
+          <a:lstStyle/>
+          <a:p>
+            <a:pPr algn="ctr"/>
+          </a:p>
+        </p:txBody>
+      </p:sp>
       <p:pic>
         <p:nvPicPr>
-          <p:cNvPr id="16" name="Picture 15" descr="check_steel.png"/>
+          <p:cNvPr id="20" name="Picture 19" descr="check_white.png"/>
           <p:cNvPicPr>
             <a:picLocks noChangeAspect="1"/>
           </p:cNvPicPr>
@@ -10122,8 +10329,8 @@
         </p:blipFill>
         <p:spPr>
           <a:xfrm>
-            <a:off x="987552" y="4352544"/>
-            <a:ext cx="237744" cy="237744"/>
+            <a:off x="6523695" y="3588471"/>
+            <a:ext cx="266273" cy="266273"/>
           </a:xfrm>
           <a:prstGeom prst="rect">
             <a:avLst/>
@@ -10132,14 +10339,14 @@
       </p:pic>
       <p:sp>
         <p:nvSpPr>
-          <p:cNvPr id="17" name="TextBox 16"/>
+          <p:cNvPr id="21" name="TextBox 20"/>
           <p:cNvSpPr txBox="1"/>
           <p:nvPr/>
         </p:nvSpPr>
         <p:spPr>
           <a:xfrm>
-            <a:off x="1353312" y="4206240"/>
-            <a:ext cx="5029200" cy="530352"/>
+            <a:off x="7040880" y="3328416"/>
+            <a:ext cx="4206240" cy="786384"/>
           </a:xfrm>
           <a:prstGeom prst="rect">
             <a:avLst/>
@@ -10164,7 +10371,7 @@
               </a:spcAft>
             </a:pPr>
             <a:r>
-              <a:rPr sz="1200" b="0">
+              <a:rPr sz="1150" b="0">
                 <a:solidFill>
                   <a:srgbClr val="1A1A1A"/>
                 </a:solidFill>
@@ -10177,18 +10384,18 @@
       </p:sp>
       <p:sp>
         <p:nvSpPr>
-          <p:cNvPr id="18" name="Rounded Rectangle 17"/>
+          <p:cNvPr id="22" name="Rounded Rectangle 21"/>
           <p:cNvSpPr/>
           <p:nvPr/>
         </p:nvSpPr>
         <p:spPr>
           <a:xfrm>
-            <a:off x="841248" y="4809744"/>
-            <a:ext cx="5715000" cy="530352"/>
+            <a:off x="841248" y="4261104"/>
+            <a:ext cx="5138928" cy="786384"/>
           </a:xfrm>
           <a:prstGeom prst="roundRect">
             <a:avLst>
-              <a:gd name="adj" fmla="val 6000"/>
+              <a:gd name="adj" fmla="val 7000"/>
             </a:avLst>
           </a:prstGeom>
           <a:solidFill>
@@ -10223,9 +10430,55 @@
           </a:p>
         </p:txBody>
       </p:sp>
+      <p:sp>
+        <p:nvSpPr>
+          <p:cNvPr id="23" name="Rounded Rectangle 22"/>
+          <p:cNvSpPr/>
+          <p:nvPr/>
+        </p:nvSpPr>
+        <p:spPr>
+          <a:xfrm>
+            <a:off x="987552" y="4398264"/>
+            <a:ext cx="512064" cy="512064"/>
+          </a:xfrm>
+          <a:prstGeom prst="roundRect">
+            <a:avLst>
+              <a:gd name="adj" fmla="val 26000"/>
+            </a:avLst>
+          </a:prstGeom>
+          <a:solidFill>
+            <a:srgbClr val="EE0000"/>
+          </a:solidFill>
+          <a:ln>
+            <a:noFill/>
+          </a:ln>
+          <a:effectLst/>
+        </p:spPr>
+        <p:style>
+          <a:lnRef idx="1">
+            <a:schemeClr val="accent1"/>
+          </a:lnRef>
+          <a:fillRef idx="3">
+            <a:schemeClr val="accent1"/>
+          </a:fillRef>
+          <a:effectRef idx="2">
+            <a:schemeClr val="accent1"/>
+          </a:effectRef>
+          <a:fontRef idx="minor">
+            <a:schemeClr val="lt1"/>
+          </a:fontRef>
+        </p:style>
+        <p:txBody>
+          <a:bodyPr rtlCol="0" anchor="ctr"/>
+          <a:lstStyle/>
+          <a:p>
+            <a:pPr algn="ctr"/>
+          </a:p>
+        </p:txBody>
+      </p:sp>
       <p:pic>
         <p:nvPicPr>
-          <p:cNvPr id="19" name="Picture 18" descr="check_steel.png"/>
+          <p:cNvPr id="24" name="Picture 23" descr="check_white.png"/>
           <p:cNvPicPr>
             <a:picLocks noChangeAspect="1"/>
           </p:cNvPicPr>
@@ -10239,8 +10492,8 @@
         </p:blipFill>
         <p:spPr>
           <a:xfrm>
-            <a:off x="987552" y="4956048"/>
-            <a:ext cx="237744" cy="237744"/>
+            <a:off x="1110447" y="4521159"/>
+            <a:ext cx="266273" cy="266273"/>
           </a:xfrm>
           <a:prstGeom prst="rect">
             <a:avLst/>
@@ -10249,14 +10502,14 @@
       </p:pic>
       <p:sp>
         <p:nvSpPr>
-          <p:cNvPr id="20" name="TextBox 19"/>
+          <p:cNvPr id="25" name="TextBox 24"/>
           <p:cNvSpPr txBox="1"/>
           <p:nvPr/>
         </p:nvSpPr>
         <p:spPr>
           <a:xfrm>
-            <a:off x="1353312" y="4809744"/>
-            <a:ext cx="5029200" cy="530352"/>
+            <a:off x="1627632" y="4261104"/>
+            <a:ext cx="4206240" cy="786384"/>
           </a:xfrm>
           <a:prstGeom prst="rect">
             <a:avLst/>
@@ -10281,7 +10534,7 @@
               </a:spcAft>
             </a:pPr>
             <a:r>
-              <a:rPr sz="1200" b="0">
+              <a:rPr sz="1150" b="0">
                 <a:solidFill>
                   <a:srgbClr val="1A1A1A"/>
                 </a:solidFill>
@@ -10292,16 +10545,310 @@
           </a:p>
         </p:txBody>
       </p:sp>
-      <p:sp>
-        <p:nvSpPr>
-          <p:cNvPr id="21" name="Rounded Rectangle 20"/>
+      <p:cxnSp>
+        <p:nvCxnSpPr>
+          <p:cNvPr id="26" name="Connector 25"/>
+          <p:cNvCxnSpPr/>
+          <p:nvPr/>
+        </p:nvCxnSpPr>
+        <p:spPr>
+          <a:xfrm>
+            <a:off x="841248" y="6437376"/>
+            <a:ext cx="10509199" cy="0"/>
+          </a:xfrm>
+          <a:prstGeom prst="bentConnector3">
+            <a:avLst/>
+          </a:prstGeom>
+          <a:ln w="12700">
+            <a:solidFill>
+              <a:srgbClr val="DDE1E6"/>
+            </a:solidFill>
+          </a:ln>
+          <a:effectLst/>
+        </p:spPr>
+        <p:style>
+          <a:lnRef idx="2">
+            <a:schemeClr val="accent1"/>
+          </a:lnRef>
+          <a:fillRef idx="0">
+            <a:schemeClr val="accent1"/>
+          </a:fillRef>
+          <a:effectRef idx="1">
+            <a:schemeClr val="accent1"/>
+          </a:effectRef>
+          <a:fontRef idx="minor">
+            <a:schemeClr val="tx1"/>
+          </a:fontRef>
+        </p:style>
+      </p:cxnSp>
+      <p:sp>
+        <p:nvSpPr>
+          <p:cNvPr id="27" name="TextBox 26"/>
+          <p:cNvSpPr txBox="1"/>
+          <p:nvPr/>
+        </p:nvSpPr>
+        <p:spPr>
+          <a:xfrm>
+            <a:off x="841248" y="6473952"/>
+            <a:ext cx="7315200" cy="274320"/>
+          </a:xfrm>
+          <a:prstGeom prst="rect">
+            <a:avLst/>
+          </a:prstGeom>
+          <a:noFill/>
+        </p:spPr>
+        <p:txBody>
+          <a:bodyPr wrap="square" anchor="t" lIns="0" rIns="0" tIns="0" bIns="0">
+            <a:spAutoFit/>
+          </a:bodyPr>
+          <a:lstStyle/>
+          <a:p>
+            <a:pPr algn="l">
+              <a:lnSpc>
+                <a:spcPct val="106000"/>
+              </a:lnSpc>
+              <a:spcBef>
+                <a:spcPts val="0"/>
+              </a:spcBef>
+              <a:spcAft>
+                <a:spcPts val="0"/>
+              </a:spcAft>
+            </a:pPr>
+            <a:r>
+              <a:rPr sz="950" b="0">
+                <a:solidFill>
+                  <a:srgbClr val="8A9099"/>
+                </a:solidFill>
+                <a:latin typeface="Red Hat Text"/>
+              </a:rPr>
+              <a:t>CONFIDENTIAL</a:t>
+            </a:r>
+          </a:p>
+        </p:txBody>
+      </p:sp>
+      <p:sp>
+        <p:nvSpPr>
+          <p:cNvPr id="28" name="TextBox 27"/>
+          <p:cNvSpPr txBox="1"/>
+          <p:nvPr/>
+        </p:nvSpPr>
+        <p:spPr>
+          <a:xfrm>
+            <a:off x="10801807" y="6473952"/>
+            <a:ext cx="548640" cy="274320"/>
+          </a:xfrm>
+          <a:prstGeom prst="rect">
+            <a:avLst/>
+          </a:prstGeom>
+          <a:noFill/>
+        </p:spPr>
+        <p:txBody>
+          <a:bodyPr wrap="square" anchor="t" lIns="0" rIns="0" tIns="0" bIns="0">
+            <a:spAutoFit/>
+          </a:bodyPr>
+          <a:lstStyle/>
+          <a:p>
+            <a:pPr algn="r">
+              <a:lnSpc>
+                <a:spcPct val="106000"/>
+              </a:lnSpc>
+              <a:spcBef>
+                <a:spcPts val="0"/>
+              </a:spcBef>
+              <a:spcAft>
+                <a:spcPts val="0"/>
+              </a:spcAft>
+            </a:pPr>
+            <a:r>
+              <a:rPr sz="950" b="0">
+                <a:solidFill>
+                  <a:srgbClr val="8A9099"/>
+                </a:solidFill>
+                <a:latin typeface="Red Hat Text"/>
+              </a:rPr>
+              <a:t>6</a:t>
+            </a:r>
+          </a:p>
+        </p:txBody>
+      </p:sp>
+    </p:spTree>
+  </p:cSld>
+  <p:clrMapOvr>
+    <a:masterClrMapping/>
+  </p:clrMapOvr>
+</p:sld>
+</file>
+
+<file path=ppt/slides/slide8.xml><?xml version="1.0" encoding="utf-8"?>
+<p:sld xmlns:a="http://schemas.openxmlformats.org/drawingml/2006/main" xmlns:p="http://schemas.openxmlformats.org/presentationml/2006/main" xmlns:r="http://schemas.openxmlformats.org/officeDocument/2006/relationships">
+  <p:cSld>
+    <p:spTree>
+      <p:nvGrpSpPr>
+        <p:cNvPr id="1" name=""/>
+        <p:cNvGrpSpPr/>
+        <p:nvPr/>
+      </p:nvGrpSpPr>
+      <p:grpSpPr/>
+      <p:pic>
+        <p:nvPicPr>
+          <p:cNvPr id="2" name="Picture 1" descr="redhat_logo.jpg"/>
+          <p:cNvPicPr>
+            <a:picLocks noChangeAspect="1"/>
+          </p:cNvPicPr>
+          <p:nvPr/>
+        </p:nvPicPr>
+        <p:blipFill>
+          <a:blip r:embed="rId2"/>
+          <a:stretch>
+            <a:fillRect/>
+          </a:stretch>
+        </p:blipFill>
+        <p:spPr>
+          <a:xfrm>
+            <a:off x="10326319" y="475488"/>
+            <a:ext cx="1024128" cy="242248"/>
+          </a:xfrm>
+          <a:prstGeom prst="rect">
+            <a:avLst/>
+          </a:prstGeom>
+        </p:spPr>
+      </p:pic>
+      <p:sp>
+        <p:nvSpPr>
+          <p:cNvPr id="3" name="TextBox 2"/>
+          <p:cNvSpPr txBox="1"/>
+          <p:nvPr/>
+        </p:nvSpPr>
+        <p:spPr>
+          <a:xfrm>
+            <a:off x="841248" y="548640"/>
+            <a:ext cx="8595360" cy="274320"/>
+          </a:xfrm>
+          <a:prstGeom prst="rect">
+            <a:avLst/>
+          </a:prstGeom>
+          <a:noFill/>
+        </p:spPr>
+        <p:txBody>
+          <a:bodyPr wrap="square" anchor="t" lIns="0" rIns="0" tIns="0" bIns="0">
+            <a:spAutoFit/>
+          </a:bodyPr>
+          <a:lstStyle/>
+          <a:p>
+            <a:pPr algn="l">
+              <a:lnSpc>
+                <a:spcPct val="106000"/>
+              </a:lnSpc>
+              <a:spcBef>
+                <a:spcPts val="0"/>
+              </a:spcBef>
+              <a:spcAft>
+                <a:spcPts val="0"/>
+              </a:spcAft>
+            </a:pPr>
+            <a:r>
+              <a:rPr sz="1250" b="1" spc="220">
+                <a:solidFill>
+                  <a:srgbClr val="EE0000"/>
+                </a:solidFill>
+                <a:latin typeface="Red Hat Display"/>
+              </a:rPr>
+              <a:t>M23 · APPLICATION MODERNIZATION</a:t>
+            </a:r>
+          </a:p>
+        </p:txBody>
+      </p:sp>
+      <p:sp>
+        <p:nvSpPr>
+          <p:cNvPr id="4" name="TextBox 3"/>
+          <p:cNvSpPr txBox="1"/>
+          <p:nvPr/>
+        </p:nvSpPr>
+        <p:spPr>
+          <a:xfrm>
+            <a:off x="841248" y="877824"/>
+            <a:ext cx="10515600" cy="548640"/>
+          </a:xfrm>
+          <a:prstGeom prst="rect">
+            <a:avLst/>
+          </a:prstGeom>
+          <a:noFill/>
+        </p:spPr>
+        <p:txBody>
+          <a:bodyPr wrap="none" anchor="t" lIns="0" rIns="0" tIns="0" bIns="0">
+            <a:spAutoFit/>
+          </a:bodyPr>
+          <a:lstStyle/>
+          <a:p>
+            <a:pPr algn="l">
+              <a:lnSpc>
+                <a:spcPct val="100000"/>
+              </a:lnSpc>
+              <a:spcBef>
+                <a:spcPts val="0"/>
+              </a:spcBef>
+              <a:spcAft>
+                <a:spcPts val="0"/>
+              </a:spcAft>
+            </a:pPr>
+            <a:r>
+              <a:rPr sz="2500" b="1">
+                <a:solidFill>
+                  <a:srgbClr val="1A1A1A"/>
+                </a:solidFill>
+                <a:latin typeface="Red Hat Display"/>
+              </a:rPr>
+              <a:t>Modernize loop</a:t>
+            </a:r>
+          </a:p>
+        </p:txBody>
+      </p:sp>
+      <p:cxnSp>
+        <p:nvCxnSpPr>
+          <p:cNvPr id="5" name="Connector 4"/>
+          <p:cNvCxnSpPr/>
+          <p:nvPr/>
+        </p:nvCxnSpPr>
+        <p:spPr>
+          <a:xfrm>
+            <a:off x="841248" y="1554480"/>
+            <a:ext cx="1371600" cy="0"/>
+          </a:xfrm>
+          <a:prstGeom prst="bentConnector3">
+            <a:avLst/>
+          </a:prstGeom>
+          <a:ln w="31750">
+            <a:solidFill>
+              <a:srgbClr val="EE0000"/>
+            </a:solidFill>
+          </a:ln>
+          <a:effectLst/>
+        </p:spPr>
+        <p:style>
+          <a:lnRef idx="2">
+            <a:schemeClr val="accent1"/>
+          </a:lnRef>
+          <a:fillRef idx="0">
+            <a:schemeClr val="accent1"/>
+          </a:fillRef>
+          <a:effectRef idx="1">
+            <a:schemeClr val="accent1"/>
+          </a:effectRef>
+          <a:fontRef idx="minor">
+            <a:schemeClr val="tx1"/>
+          </a:fontRef>
+        </p:style>
+      </p:cxnSp>
+      <p:sp>
+        <p:nvSpPr>
+          <p:cNvPr id="6" name="Rounded Rectangle 5"/>
           <p:cNvSpPr/>
           <p:nvPr/>
         </p:nvSpPr>
         <p:spPr>
           <a:xfrm>
-            <a:off x="6812280" y="2395728"/>
-            <a:ext cx="4538167" cy="2944368"/>
+            <a:off x="841248" y="2331720"/>
+            <a:ext cx="10509199" cy="3794760"/>
           </a:xfrm>
           <a:prstGeom prst="roundRect">
             <a:avLst>
@@ -10340,169 +10887,33 @@
           </a:p>
         </p:txBody>
       </p:sp>
-      <p:sp>
-        <p:nvSpPr>
-          <p:cNvPr id="22" name="Rounded Rectangle 21"/>
-          <p:cNvSpPr/>
-          <p:nvPr/>
-        </p:nvSpPr>
-        <p:spPr>
-          <a:xfrm>
-            <a:off x="7013448" y="2596896"/>
-            <a:ext cx="1298448" cy="310896"/>
-          </a:xfrm>
-          <a:prstGeom prst="roundRect">
-            <a:avLst>
-              <a:gd name="adj" fmla="val 50000"/>
-            </a:avLst>
-          </a:prstGeom>
-          <a:solidFill>
-            <a:srgbClr val="FCECEC"/>
-          </a:solidFill>
-          <a:ln>
-            <a:noFill/>
-          </a:ln>
-          <a:effectLst/>
-        </p:spPr>
-        <p:style>
-          <a:lnRef idx="1">
-            <a:schemeClr val="accent1"/>
-          </a:lnRef>
-          <a:fillRef idx="3">
-            <a:schemeClr val="accent1"/>
-          </a:fillRef>
-          <a:effectRef idx="2">
-            <a:schemeClr val="accent1"/>
-          </a:effectRef>
-          <a:fontRef idx="minor">
-            <a:schemeClr val="lt1"/>
-          </a:fontRef>
-        </p:style>
-        <p:txBody>
-          <a:bodyPr rtlCol="0" anchor="ctr"/>
-          <a:lstStyle/>
-          <a:p>
-            <a:pPr algn="ctr"/>
-          </a:p>
-        </p:txBody>
-      </p:sp>
-      <p:sp>
-        <p:nvSpPr>
-          <p:cNvPr id="23" name="TextBox 22"/>
-          <p:cNvSpPr txBox="1"/>
-          <p:nvPr/>
-        </p:nvSpPr>
-        <p:spPr>
-          <a:xfrm>
-            <a:off x="7013448" y="2596896"/>
-            <a:ext cx="1298448" cy="310896"/>
-          </a:xfrm>
-          <a:prstGeom prst="rect">
-            <a:avLst/>
-          </a:prstGeom>
-          <a:noFill/>
-        </p:spPr>
-        <p:txBody>
-          <a:bodyPr wrap="none" anchor="ctr" lIns="0" rIns="0" tIns="0" bIns="0">
-            <a:spAutoFit/>
-          </a:bodyPr>
-          <a:lstStyle/>
-          <a:p>
-            <a:pPr algn="ctr">
-              <a:lnSpc>
-                <a:spcPct val="106000"/>
-              </a:lnSpc>
-              <a:spcBef>
-                <a:spcPts val="0"/>
-              </a:spcBef>
-              <a:spcAft>
-                <a:spcPts val="0"/>
-              </a:spcAft>
-            </a:pPr>
-            <a:r>
-              <a:rPr sz="850" b="1">
-                <a:solidFill>
-                  <a:srgbClr val="B80000"/>
-                </a:solidFill>
-                <a:latin typeface="Red Hat Display"/>
-              </a:rPr>
-              <a:t>MEDIA PASS</a:t>
-            </a:r>
-          </a:p>
-        </p:txBody>
-      </p:sp>
       <p:pic>
         <p:nvPicPr>
-          <p:cNvPr id="24" name="Picture 23" descr="eye_slate.png"/>
+          <p:cNvPr id="7" name="Picture 6" descr="02-modernize-loop.png"/>
           <p:cNvPicPr>
             <a:picLocks noChangeAspect="1"/>
           </p:cNvPicPr>
           <p:nvPr/>
         </p:nvPicPr>
         <p:blipFill>
-          <a:blip r:embed="rId4"/>
+          <a:blip r:embed="rId3"/>
           <a:stretch>
             <a:fillRect/>
           </a:stretch>
         </p:blipFill>
         <p:spPr>
           <a:xfrm>
-            <a:off x="8843619" y="3108960"/>
-            <a:ext cx="475488" cy="475488"/>
+            <a:off x="1042416" y="3903785"/>
+            <a:ext cx="10106863" cy="650629"/>
           </a:xfrm>
           <a:prstGeom prst="rect">
             <a:avLst/>
           </a:prstGeom>
         </p:spPr>
       </p:pic>
-      <p:sp>
-        <p:nvSpPr>
-          <p:cNvPr id="25" name="TextBox 24"/>
-          <p:cNvSpPr txBox="1"/>
-          <p:nvPr/>
-        </p:nvSpPr>
-        <p:spPr>
-          <a:xfrm>
-            <a:off x="7050024" y="3721608"/>
-            <a:ext cx="4062679" cy="1481328"/>
-          </a:xfrm>
-          <a:prstGeom prst="rect">
-            <a:avLst/>
-          </a:prstGeom>
-          <a:noFill/>
-        </p:spPr>
-        <p:txBody>
-          <a:bodyPr wrap="square" anchor="t" lIns="0" rIns="0" tIns="0" bIns="0">
-            <a:spAutoFit/>
-          </a:bodyPr>
-          <a:lstStyle/>
-          <a:p>
-            <a:pPr algn="l">
-              <a:lnSpc>
-                <a:spcPct val="120000"/>
-              </a:lnSpc>
-              <a:spcBef>
-                <a:spcPts val="0"/>
-              </a:spcBef>
-              <a:spcAft>
-                <a:spcPts val="0"/>
-              </a:spcAft>
-            </a:pPr>
-            <a:r>
-              <a:rPr sz="950" b="0">
-                <a:solidFill>
-                  <a:srgbClr val="8A9099"/>
-                </a:solidFill>
-                <a:latin typeface="Red Hat Text"/>
-              </a:rPr>
-              <a:t>A funnel graphic — wide "portfolio (assess)" at top narrowing through "analyze (MTA effort)" to "fix + ship" at the spout, with a small "retain/retire" side-chute. Below the funnel, a strangler mini-diagram: legacy box and modern box side by side, a traffic-split dial moving from 100/0 toward 0/100, labeled "Service Interconnect → Resilience, Multi-Cluster &amp; DR." A footer "When NOT to: retire · replatform-enough · un-reviewed AI."</a:t>
-            </a:r>
-          </a:p>
-        </p:txBody>
-      </p:sp>
       <p:cxnSp>
         <p:nvCxnSpPr>
-          <p:cNvPr id="26" name="Connector 25"/>
+          <p:cNvPr id="8" name="Connector 7"/>
           <p:cNvCxnSpPr/>
           <p:nvPr/>
         </p:nvCxnSpPr>
@@ -10538,7 +10949,7 @@
       </p:cxnSp>
       <p:sp>
         <p:nvSpPr>
-          <p:cNvPr id="27" name="TextBox 26"/>
+          <p:cNvPr id="9" name="TextBox 8"/>
           <p:cNvSpPr txBox="1"/>
           <p:nvPr/>
         </p:nvSpPr>
@@ -10583,7 +10994,7 @@
       </p:sp>
       <p:sp>
         <p:nvSpPr>
-          <p:cNvPr id="28" name="TextBox 27"/>
+          <p:cNvPr id="10" name="TextBox 9"/>
           <p:cNvSpPr txBox="1"/>
           <p:nvPr/>
         </p:nvSpPr>
@@ -10621,7 +11032,7 @@
                 </a:solidFill>
                 <a:latin typeface="Red Hat Text"/>
               </a:rPr>
-              <a:t>6</a:t>
+              <a:t>7</a:t>
             </a:r>
           </a:p>
         </p:txBody>
